--- a/GULib-master/report/0417_5003report/ppt/out-export-check/final_15min_defense.pptx
+++ b/GULib-master/report/0417_5003report/ppt/out-export-check/final_15min_defense.pptx
@@ -4,9 +4,6 @@
   <p:sldMasterIdLst>
     <p:sldMasterId id="2147483648" r:id="rId1"/>
   </p:sldMasterIdLst>
-  <p:notesMasterIdLst>
-    <p:notesMasterId r:id="rId17"/>
-  </p:notesMasterIdLst>
   <p:sldIdLst>
     <p:sldId id="256" r:id="rId2"/>
     <p:sldId id="257" r:id="rId3"/>
@@ -24,7 +21,10 @@
     <p:sldId id="269" r:id="rId15"/>
     <p:sldId id="270" r:id="rId16"/>
   </p:sldIdLst>
-  <p:sldSz cx="9144000" cy="5143500" type="screen16x9"/>
+  <p:notesMasterIdLst>
+    <p:notesMasterId r:id="rId17"/>
+  </p:notesMasterIdLst>
+  <p:sldSz cx="9144000" cy="5143500"/>
   <p:notesSz cx="5143500" cy="9144000"/>
   <p:defaultTextStyle>
     <a:lvl1pPr marL="0" algn="l" defTabSz="914400" rtl="0" eaLnBrk="1" latinLnBrk="0" hangingPunct="1">
@@ -118,11 +118,6 @@
       </a:defRPr>
     </a:lvl9pPr>
   </p:defaultTextStyle>
-  <p:extLst>
-    <p:ext uri="{EFAFB233-063F-42B5-8137-9DF3F51BA10A}">
-      <p15:sldGuideLst xmlns:p15="http://schemas.microsoft.com/office/powerpoint/2012/main"/>
-    </p:ext>
-  </p:extLst>
 </p:presentation>
 </file>
 
@@ -148,10 +143,234 @@
           <a:chExt cx="0" cy="0"/>
         </a:xfrm>
       </p:grpSpPr>
+      <p:sp>
+        <p:nvSpPr>
+          <p:cNvPr id="2" name="Header Placeholder 1"/>
+          <p:cNvSpPr>
+            <a:spLocks noGrp="1"/>
+          </p:cNvSpPr>
+          <p:nvPr>
+            <p:ph type="hdr" sz="quarter"/>
+          </p:nvPr>
+        </p:nvSpPr>
+        <p:spPr>
+          <a:xfrm>
+            <a:off x="0" y="0"/>
+            <a:ext cx="2971800" cy="458788"/>
+          </a:xfrm>
+          <a:prstGeom prst="rect">
+            <a:avLst/>
+          </a:prstGeom>
+        </p:spPr>
+        <p:txBody>
+          <a:bodyPr vert="horz" lIns="91440" tIns="45720" rIns="91440" bIns="45720" rtlCol="0"/>
+          <a:lstStyle>
+            <a:lvl1pPr algn="l">
+              <a:defRPr sz="1200"/>
+            </a:lvl1pPr>
+          </a:lstStyle>
+          <a:p>
+            <a:endParaRPr lang="en-US"/>
+          </a:p>
+        </p:txBody>
+      </p:sp>
+      <p:sp>
+        <p:nvSpPr>
+          <p:cNvPr id="3" name="Date Placeholder 2"/>
+          <p:cNvSpPr>
+            <a:spLocks noGrp="1"/>
+          </p:cNvSpPr>
+          <p:nvPr>
+            <p:ph type="dt" idx="1"/>
+          </p:nvPr>
+        </p:nvSpPr>
+        <p:spPr>
+          <a:xfrm>
+            <a:off x="3884613" y="0"/>
+            <a:ext cx="2971800" cy="458788"/>
+          </a:xfrm>
+          <a:prstGeom prst="rect">
+            <a:avLst/>
+          </a:prstGeom>
+        </p:spPr>
+        <p:txBody>
+          <a:bodyPr vert="horz" lIns="91440" tIns="45720" rIns="91440" bIns="45720" rtlCol="0"/>
+          <a:lstStyle>
+            <a:lvl1pPr algn="r">
+              <a:defRPr sz="1200"/>
+            </a:lvl1pPr>
+          </a:lstStyle>
+          <a:p>
+            <a:fld id="{5282F153-3F37-0F45-9E97-73ACFA13230C}" type="datetimeFigureOut">
+              <a:rPr lang="en-US"/>
+              <a:t>7/23/19</a:t>
+            </a:fld>
+            <a:endParaRPr lang="en-US"/>
+          </a:p>
+        </p:txBody>
+      </p:sp>
+      <p:sp>
+        <p:nvSpPr>
+          <p:cNvPr id="4" name="Slide Image Placeholder 3"/>
+          <p:cNvSpPr>
+            <a:spLocks noGrp="1" noRot="1" noChangeAspect="1"/>
+          </p:cNvSpPr>
+          <p:nvPr>
+            <p:ph type="sldImg" idx="2"/>
+          </p:nvPr>
+        </p:nvSpPr>
+        <p:spPr>
+          <a:xfrm>
+            <a:off x="685800" y="1143000"/>
+            <a:ext cx="5486400" cy="3086100"/>
+          </a:xfrm>
+          <a:prstGeom prst="rect">
+            <a:avLst/>
+          </a:prstGeom>
+          <a:noFill/>
+          <a:ln w="12700">
+            <a:solidFill>
+              <a:prstClr val="black"/>
+            </a:solidFill>
+          </a:ln>
+        </p:spPr>
+        <p:txBody>
+          <a:bodyPr vert="horz" lIns="91440" tIns="45720" rIns="91440" bIns="45720" rtlCol="0" anchor="ctr"/>
+          <a:lstStyle/>
+          <a:p>
+            <a:endParaRPr lang="en-US"/>
+          </a:p>
+        </p:txBody>
+      </p:sp>
+      <p:sp>
+        <p:nvSpPr>
+          <p:cNvPr id="5" name="Notes Placeholder 4"/>
+          <p:cNvSpPr>
+            <a:spLocks noGrp="1"/>
+          </p:cNvSpPr>
+          <p:nvPr>
+            <p:ph type="body" sz="quarter" idx="3"/>
+          </p:nvPr>
+        </p:nvSpPr>
+        <p:spPr>
+          <a:xfrm>
+            <a:off x="685800" y="4400550"/>
+            <a:ext cx="5486400" cy="3600450"/>
+          </a:xfrm>
+          <a:prstGeom prst="rect">
+            <a:avLst/>
+          </a:prstGeom>
+        </p:spPr>
+        <p:txBody>
+          <a:bodyPr vert="horz" lIns="91440" tIns="45720" rIns="91440" bIns="45720" rtlCol="0"/>
+          <a:lstStyle/>
+          <a:p>
+            <a:pPr lvl="0"/>
+            <a:r>
+              <a:rPr lang="en-US"/>
+              <a:t>Click to edit Master text styles</a:t>
+            </a:r>
+          </a:p>
+          <a:p>
+            <a:pPr lvl="1"/>
+            <a:r>
+              <a:rPr lang="en-US"/>
+              <a:t>Second level</a:t>
+            </a:r>
+          </a:p>
+          <a:p>
+            <a:pPr lvl="2"/>
+            <a:r>
+              <a:rPr lang="en-US"/>
+              <a:t>Third level</a:t>
+            </a:r>
+          </a:p>
+          <a:p>
+            <a:pPr lvl="3"/>
+            <a:r>
+              <a:rPr lang="en-US"/>
+              <a:t>Fourth level</a:t>
+            </a:r>
+          </a:p>
+          <a:p>
+            <a:pPr lvl="4"/>
+            <a:r>
+              <a:rPr lang="en-US"/>
+              <a:t>Fifth level</a:t>
+            </a:r>
+          </a:p>
+        </p:txBody>
+      </p:sp>
+      <p:sp>
+        <p:nvSpPr>
+          <p:cNvPr id="6" name="Footer Placeholder 5"/>
+          <p:cNvSpPr>
+            <a:spLocks noGrp="1"/>
+          </p:cNvSpPr>
+          <p:nvPr>
+            <p:ph type="ftr" sz="quarter" idx="4"/>
+          </p:nvPr>
+        </p:nvSpPr>
+        <p:spPr>
+          <a:xfrm>
+            <a:off x="0" y="8685213"/>
+            <a:ext cx="2971800" cy="458787"/>
+          </a:xfrm>
+          <a:prstGeom prst="rect">
+            <a:avLst/>
+          </a:prstGeom>
+        </p:spPr>
+        <p:txBody>
+          <a:bodyPr vert="horz" lIns="91440" tIns="45720" rIns="91440" bIns="45720" rtlCol="0" anchor="b"/>
+          <a:lstStyle>
+            <a:lvl1pPr algn="l">
+              <a:defRPr sz="1200"/>
+            </a:lvl1pPr>
+          </a:lstStyle>
+          <a:p>
+            <a:endParaRPr lang="en-US"/>
+          </a:p>
+        </p:txBody>
+      </p:sp>
+      <p:sp>
+        <p:nvSpPr>
+          <p:cNvPr id="7" name="Slide Number Placeholder 6"/>
+          <p:cNvSpPr>
+            <a:spLocks noGrp="1"/>
+          </p:cNvSpPr>
+          <p:nvPr>
+            <p:ph type="sldNum" sz="quarter" idx="5"/>
+          </p:nvPr>
+        </p:nvSpPr>
+        <p:spPr>
+          <a:xfrm>
+            <a:off x="3884613" y="8685213"/>
+            <a:ext cx="2971800" cy="458787"/>
+          </a:xfrm>
+          <a:prstGeom prst="rect">
+            <a:avLst/>
+          </a:prstGeom>
+        </p:spPr>
+        <p:txBody>
+          <a:bodyPr vert="horz" lIns="91440" tIns="45720" rIns="91440" bIns="45720" rtlCol="0" anchor="b"/>
+          <a:lstStyle>
+            <a:lvl1pPr algn="r">
+              <a:defRPr sz="1200"/>
+            </a:lvl1pPr>
+          </a:lstStyle>
+          <a:p>
+            <a:fld id="{CE5E9CC1-C706-0F49-92D6-E571CC5EEA8F}" type="slidenum">
+              <a:rPr lang="en-US"/>
+              <a:t>‹#›</a:t>
+            </a:fld>
+            <a:endParaRPr lang="en-US"/>
+          </a:p>
+        </p:txBody>
+      </p:sp>
     </p:spTree>
     <p:extLst>
       <p:ext uri="{BB962C8B-B14F-4D97-AF65-F5344CB8AC3E}">
-        <p14:creationId xmlns:p14="http://schemas.microsoft.com/office/powerpoint/2010/main" val="2799768675"/>
+        <p14:creationId xmlns:p14="http://schemas.microsoft.com/office/powerpoint/2010/main" val="1024086991"/>
       </p:ext>
     </p:extLst>
   </p:cSld>
@@ -295,6 +514,10 @@
           <a:bodyPr/>
           <a:lstStyle/>
           <a:p>
+            <a:r>
+              <a:rPr lang="en-US" dirty="0"/>
+              <a:t/>
+            </a:r>
             <a:endParaRPr lang="en-US" dirty="0"/>
           </a:p>
         </p:txBody>
@@ -379,6 +602,10 @@
           <a:bodyPr/>
           <a:lstStyle/>
           <a:p>
+            <a:r>
+              <a:rPr lang="en-US" dirty="0"/>
+              <a:t/>
+            </a:r>
             <a:endParaRPr lang="en-US" dirty="0"/>
           </a:p>
         </p:txBody>
@@ -463,6 +690,10 @@
           <a:bodyPr/>
           <a:lstStyle/>
           <a:p>
+            <a:r>
+              <a:rPr lang="en-US" dirty="0"/>
+              <a:t/>
+            </a:r>
             <a:endParaRPr lang="en-US" dirty="0"/>
           </a:p>
         </p:txBody>
@@ -547,6 +778,10 @@
           <a:bodyPr/>
           <a:lstStyle/>
           <a:p>
+            <a:r>
+              <a:rPr lang="en-US" dirty="0"/>
+              <a:t/>
+            </a:r>
             <a:endParaRPr lang="en-US" dirty="0"/>
           </a:p>
         </p:txBody>
@@ -631,6 +866,10 @@
           <a:bodyPr/>
           <a:lstStyle/>
           <a:p>
+            <a:r>
+              <a:rPr lang="en-US" dirty="0"/>
+              <a:t/>
+            </a:r>
             <a:endParaRPr lang="en-US" dirty="0"/>
           </a:p>
         </p:txBody>
@@ -715,6 +954,10 @@
           <a:bodyPr/>
           <a:lstStyle/>
           <a:p>
+            <a:r>
+              <a:rPr lang="en-US" dirty="0"/>
+              <a:t/>
+            </a:r>
             <a:endParaRPr lang="en-US" dirty="0"/>
           </a:p>
         </p:txBody>
@@ -799,6 +1042,10 @@
           <a:bodyPr/>
           <a:lstStyle/>
           <a:p>
+            <a:r>
+              <a:rPr lang="en-US" dirty="0"/>
+              <a:t/>
+            </a:r>
             <a:endParaRPr lang="en-US" dirty="0"/>
           </a:p>
         </p:txBody>
@@ -883,6 +1130,10 @@
           <a:bodyPr/>
           <a:lstStyle/>
           <a:p>
+            <a:r>
+              <a:rPr lang="en-US" dirty="0"/>
+              <a:t/>
+            </a:r>
             <a:endParaRPr lang="en-US" dirty="0"/>
           </a:p>
         </p:txBody>
@@ -967,6 +1218,10 @@
           <a:bodyPr/>
           <a:lstStyle/>
           <a:p>
+            <a:r>
+              <a:rPr lang="en-US" dirty="0"/>
+              <a:t/>
+            </a:r>
             <a:endParaRPr lang="en-US" dirty="0"/>
           </a:p>
         </p:txBody>
@@ -1051,6 +1306,10 @@
           <a:bodyPr/>
           <a:lstStyle/>
           <a:p>
+            <a:r>
+              <a:rPr lang="en-US" dirty="0"/>
+              <a:t/>
+            </a:r>
             <a:endParaRPr lang="en-US" dirty="0"/>
           </a:p>
         </p:txBody>
@@ -1135,6 +1394,10 @@
           <a:bodyPr/>
           <a:lstStyle/>
           <a:p>
+            <a:r>
+              <a:rPr lang="en-US" dirty="0"/>
+              <a:t/>
+            </a:r>
             <a:endParaRPr lang="en-US" dirty="0"/>
           </a:p>
         </p:txBody>
@@ -1219,6 +1482,10 @@
           <a:bodyPr/>
           <a:lstStyle/>
           <a:p>
+            <a:r>
+              <a:rPr lang="en-US" dirty="0"/>
+              <a:t/>
+            </a:r>
             <a:endParaRPr lang="en-US" dirty="0"/>
           </a:p>
         </p:txBody>
@@ -1303,6 +1570,10 @@
           <a:bodyPr/>
           <a:lstStyle/>
           <a:p>
+            <a:r>
+              <a:rPr lang="en-US" dirty="0"/>
+              <a:t/>
+            </a:r>
             <a:endParaRPr lang="en-US" dirty="0"/>
           </a:p>
         </p:txBody>
@@ -1387,6 +1658,10 @@
           <a:bodyPr/>
           <a:lstStyle/>
           <a:p>
+            <a:r>
+              <a:rPr lang="en-US" dirty="0"/>
+              <a:t/>
+            </a:r>
             <a:endParaRPr lang="en-US" dirty="0"/>
           </a:p>
         </p:txBody>
@@ -1471,6 +1746,10 @@
           <a:bodyPr/>
           <a:lstStyle/>
           <a:p>
+            <a:r>
+              <a:rPr lang="en-US" dirty="0"/>
+              <a:t/>
+            </a:r>
             <a:endParaRPr lang="en-US" dirty="0"/>
           </a:p>
         </p:txBody>
@@ -1544,11 +1823,6 @@
 <file path=ppt/slideMasters/slideMaster1.xml><?xml version="1.0" encoding="utf-8"?>
 <p:sldMaster xmlns:a="http://schemas.openxmlformats.org/drawingml/2006/main" xmlns:r="http://schemas.openxmlformats.org/officeDocument/2006/relationships" xmlns:p="http://schemas.openxmlformats.org/presentationml/2006/main">
   <p:cSld>
-    <p:bg>
-      <p:bgRef idx="1001">
-        <a:schemeClr val="bg1"/>
-      </p:bgRef>
-    </p:bg>
     <p:spTree>
       <p:nvGrpSpPr>
         <p:cNvPr id="1" name=""/>
@@ -1831,7 +2105,6 @@
         <a:solidFill>
           <a:srgbClr val="16263F"/>
         </a:solidFill>
-        <a:effectLst/>
       </p:bgPr>
     </p:bg>
     <p:spTree>
@@ -1876,13 +2149,6 @@
             <a:prstDash val="solid"/>
           </a:ln>
         </p:spPr>
-        <p:txBody>
-          <a:bodyPr/>
-          <a:lstStyle/>
-          <a:p>
-            <a:endParaRPr lang="zh-CN" altLang="en-US"/>
-          </a:p>
-        </p:txBody>
       </p:sp>
       <p:sp>
         <p:nvSpPr>
@@ -1907,7 +2173,7 @@
           </a:bodyPr>
           <a:lstStyle/>
           <a:p>
-            <a:pPr marL="0" indent="0">
+            <a:pPr indent="0" marL="0">
               <a:buNone/>
             </a:pPr>
             <a:r>
@@ -1924,7 +2190,7 @@
             <a:endParaRPr lang="en-US" sz="2400" dirty="0"/>
           </a:p>
           <a:p>
-            <a:pPr marL="0" indent="0">
+            <a:pPr indent="0" marL="0">
               <a:buNone/>
             </a:pPr>
             <a:r>
@@ -1963,7 +2229,7 @@
           <a:bodyPr wrap="square" lIns="0" tIns="0" rIns="0" bIns="0" rtlCol="0" anchor="ctr"/>
           <a:lstStyle/>
           <a:p>
-            <a:pPr marL="0" indent="0">
+            <a:pPr indent="0" marL="0">
               <a:buNone/>
             </a:pPr>
             <a:r>
@@ -2002,7 +2268,7 @@
           <a:bodyPr wrap="square" lIns="0" tIns="0" rIns="0" bIns="0" rtlCol="0" anchor="ctr"/>
           <a:lstStyle/>
           <a:p>
-            <a:pPr marL="0" indent="0">
+            <a:pPr indent="0" marL="0">
               <a:buNone/>
             </a:pPr>
             <a:r>
@@ -2019,7 +2285,7 @@
             <a:endParaRPr lang="en-US" sz="1500" dirty="0"/>
           </a:p>
           <a:p>
-            <a:pPr marL="0" indent="0">
+            <a:pPr indent="0" marL="0">
               <a:buNone/>
             </a:pPr>
             <a:r>
@@ -2058,7 +2324,7 @@
           <a:bodyPr wrap="square" lIns="0" tIns="0" rIns="0" bIns="0" rtlCol="0" anchor="ctr"/>
           <a:lstStyle/>
           <a:p>
-            <a:pPr marL="0" indent="0">
+            <a:pPr indent="0" marL="0">
               <a:buNone/>
             </a:pPr>
             <a:r>
@@ -2075,7 +2341,7 @@
             <a:endParaRPr lang="en-US" sz="1400" dirty="0"/>
           </a:p>
           <a:p>
-            <a:pPr marL="0" indent="0">
+            <a:pPr indent="0" marL="0">
               <a:buNone/>
             </a:pPr>
             <a:r>
@@ -2119,13 +2385,6 @@
             <a:prstDash val="solid"/>
           </a:ln>
         </p:spPr>
-        <p:txBody>
-          <a:bodyPr/>
-          <a:lstStyle/>
-          <a:p>
-            <a:endParaRPr lang="zh-CN" altLang="en-US"/>
-          </a:p>
-        </p:txBody>
       </p:sp>
       <p:sp>
         <p:nvSpPr>
@@ -2148,7 +2407,7 @@
           <a:bodyPr wrap="square" lIns="0" tIns="0" rIns="0" bIns="0" rtlCol="0" anchor="ctr"/>
           <a:lstStyle/>
           <a:p>
-            <a:pPr marL="0" indent="0">
+            <a:pPr indent="0" marL="0">
               <a:buNone/>
             </a:pPr>
             <a:r>
@@ -2189,7 +2448,7 @@
           </a:bodyPr>
           <a:lstStyle/>
           <a:p>
-            <a:pPr marL="0" indent="0">
+            <a:pPr indent="0" marL="0">
               <a:buNone/>
             </a:pPr>
             <a:r>
@@ -2233,13 +2492,6 @@
             <a:prstDash val="solid"/>
           </a:ln>
         </p:spPr>
-        <p:txBody>
-          <a:bodyPr/>
-          <a:lstStyle/>
-          <a:p>
-            <a:endParaRPr lang="zh-CN" altLang="en-US"/>
-          </a:p>
-        </p:txBody>
       </p:sp>
       <p:sp>
         <p:nvSpPr>
@@ -2262,7 +2514,7 @@
           <a:bodyPr wrap="square" lIns="0" tIns="0" rIns="0" bIns="0" rtlCol="0" anchor="ctr"/>
           <a:lstStyle/>
           <a:p>
-            <a:pPr marL="0" indent="0" algn="ctr">
+            <a:pPr algn="ctr" indent="0" marL="0">
               <a:buNone/>
             </a:pPr>
             <a:r>
@@ -2306,13 +2558,6 @@
             <a:prstDash val="solid"/>
           </a:ln>
         </p:spPr>
-        <p:txBody>
-          <a:bodyPr/>
-          <a:lstStyle/>
-          <a:p>
-            <a:endParaRPr lang="zh-CN" altLang="en-US"/>
-          </a:p>
-        </p:txBody>
       </p:sp>
       <p:sp>
         <p:nvSpPr>
@@ -2335,7 +2580,7 @@
           <a:bodyPr wrap="square" lIns="0" tIns="0" rIns="0" bIns="0" rtlCol="0" anchor="ctr"/>
           <a:lstStyle/>
           <a:p>
-            <a:pPr marL="0" indent="0" algn="ctr">
+            <a:pPr algn="ctr" indent="0" marL="0">
               <a:buNone/>
             </a:pPr>
             <a:r>
@@ -2379,13 +2624,6 @@
             <a:prstDash val="solid"/>
           </a:ln>
         </p:spPr>
-        <p:txBody>
-          <a:bodyPr/>
-          <a:lstStyle/>
-          <a:p>
-            <a:endParaRPr lang="zh-CN" altLang="en-US"/>
-          </a:p>
-        </p:txBody>
       </p:sp>
       <p:sp>
         <p:nvSpPr>
@@ -2408,7 +2646,7 @@
           <a:bodyPr wrap="square" lIns="0" tIns="0" rIns="0" bIns="0" rtlCol="0" anchor="ctr"/>
           <a:lstStyle/>
           <a:p>
-            <a:pPr marL="0" indent="0" algn="ctr">
+            <a:pPr algn="ctr" indent="0" marL="0">
               <a:buNone/>
             </a:pPr>
             <a:r>
@@ -2452,13 +2690,6 @@
             <a:prstDash val="solid"/>
           </a:ln>
         </p:spPr>
-        <p:txBody>
-          <a:bodyPr/>
-          <a:lstStyle/>
-          <a:p>
-            <a:endParaRPr lang="zh-CN" altLang="en-US"/>
-          </a:p>
-        </p:txBody>
       </p:sp>
       <p:sp>
         <p:nvSpPr>
@@ -2481,7 +2712,7 @@
           <a:bodyPr wrap="square" lIns="0" tIns="0" rIns="0" bIns="0" rtlCol="0" anchor="ctr"/>
           <a:lstStyle/>
           <a:p>
-            <a:pPr marL="0" indent="0" algn="ctr">
+            <a:pPr algn="ctr" indent="0" marL="0">
               <a:buNone/>
             </a:pPr>
             <a:r>
@@ -2515,7 +2746,6 @@
         <a:solidFill>
           <a:srgbClr val="F7F5F1"/>
         </a:solidFill>
-        <a:effectLst/>
       </p:bgPr>
     </p:bg>
     <p:spTree>
@@ -2558,13 +2788,6 @@
             <a:prstDash val="solid"/>
           </a:ln>
         </p:spPr>
-        <p:txBody>
-          <a:bodyPr/>
-          <a:lstStyle/>
-          <a:p>
-            <a:endParaRPr lang="zh-CN" altLang="en-US"/>
-          </a:p>
-        </p:txBody>
       </p:sp>
       <p:sp>
         <p:nvSpPr>
@@ -2587,7 +2810,7 @@
           <a:bodyPr wrap="square" lIns="0" tIns="0" rIns="0" bIns="0" rtlCol="0" anchor="ctr"/>
           <a:lstStyle/>
           <a:p>
-            <a:pPr marL="0" indent="0">
+            <a:pPr indent="0" marL="0">
               <a:buNone/>
             </a:pPr>
             <a:r>
@@ -2626,7 +2849,7 @@
           <a:bodyPr wrap="square" lIns="0" tIns="0" rIns="0" bIns="0" rtlCol="0" anchor="ctr"/>
           <a:lstStyle/>
           <a:p>
-            <a:pPr marL="0" indent="0" algn="r">
+            <a:pPr algn="r" indent="0" marL="0">
               <a:buNone/>
             </a:pPr>
             <a:r>
@@ -2665,7 +2888,7 @@
           <a:bodyPr wrap="square" lIns="0" tIns="0" rIns="0" bIns="0" rtlCol="0" anchor="ctr"/>
           <a:lstStyle/>
           <a:p>
-            <a:pPr marL="0" indent="0">
+            <a:pPr indent="0" marL="0">
               <a:buNone/>
             </a:pPr>
             <a:r>
@@ -2704,7 +2927,7 @@
           <a:bodyPr wrap="square" lIns="0" tIns="0" rIns="0" bIns="0" rtlCol="0" anchor="ctr"/>
           <a:lstStyle/>
           <a:p>
-            <a:pPr marL="0" indent="0" algn="r">
+            <a:pPr algn="r" indent="0" marL="0">
               <a:buNone/>
             </a:pPr>
             <a:r>
@@ -2724,14 +2947,14 @@
       </p:sp>
       <p:pic>
         <p:nvPicPr>
-          <p:cNvPr id="7" name="Image 0" descr="H:\project\OpenGU\GULib-master\report\0417_5003report\figures\paper_figures\FIG-2_Scaling.png"/>
+          <p:cNvPr id="7" name="Image 0" descr="H:\project\OpenGU\GULib-master\report\0417_5003report\figures\paper_figures\FIG-2_Scaling.png">    </p:cNvPr>
           <p:cNvPicPr>
             <a:picLocks noChangeAspect="1"/>
           </p:cNvPicPr>
           <p:nvPr/>
         </p:nvPicPr>
         <p:blipFill>
-          <a:blip r:embed="rId3"/>
+          <a:blip r:embed="rId1"/>
           <a:stretch>
             <a:fillRect/>
           </a:stretch>
@@ -2767,7 +2990,7 @@
           <a:bodyPr wrap="square" lIns="0" tIns="0" rIns="0" bIns="0" rtlCol="0" anchor="ctr"/>
           <a:lstStyle/>
           <a:p>
-            <a:pPr marL="0" indent="0">
+            <a:pPr indent="0" marL="0">
               <a:buNone/>
             </a:pPr>
             <a:r>
@@ -2793,12 +3016,12 @@
         </p:nvSpPr>
         <p:spPr>
           <a:xfrm>
-            <a:off x="6016752" y="1005840"/>
-            <a:ext cx="2359152" cy="960120"/>
+            <a:off x="6016752" y="960120"/>
+            <a:ext cx="2359152" cy="1005840"/>
           </a:xfrm>
           <a:prstGeom prst="roundRect">
             <a:avLst>
-              <a:gd name="adj" fmla="val 4762"/>
+              <a:gd name="adj" fmla="val 4545"/>
             </a:avLst>
           </a:prstGeom>
           <a:solidFill>
@@ -2811,13 +3034,6 @@
             <a:prstDash val="solid"/>
           </a:ln>
         </p:spPr>
-        <p:txBody>
-          <a:bodyPr/>
-          <a:lstStyle/>
-          <a:p>
-            <a:endParaRPr lang="zh-CN" altLang="en-US"/>
-          </a:p>
-        </p:txBody>
       </p:sp>
       <p:sp>
         <p:nvSpPr>
@@ -2827,7 +3043,7 @@
         </p:nvSpPr>
         <p:spPr>
           <a:xfrm>
-            <a:off x="6153912" y="1097280"/>
+            <a:off x="6153912" y="1051560"/>
             <a:ext cx="2084832" cy="182880"/>
           </a:xfrm>
           <a:prstGeom prst="rect">
@@ -2840,7 +3056,7 @@
           <a:bodyPr wrap="square" lIns="0" tIns="0" rIns="0" bIns="0" rtlCol="0" anchor="ctr"/>
           <a:lstStyle/>
           <a:p>
-            <a:pPr marL="0" indent="0">
+            <a:pPr indent="0" marL="0">
               <a:buNone/>
             </a:pPr>
             <a:r>
@@ -2866,8 +3082,8 @@
         </p:nvSpPr>
         <p:spPr>
           <a:xfrm>
-            <a:off x="6153912" y="1344168"/>
-            <a:ext cx="2084832" cy="530352"/>
+            <a:off x="6153912" y="1298448"/>
+            <a:ext cx="2084832" cy="576072"/>
           </a:xfrm>
           <a:prstGeom prst="rect">
             <a:avLst/>
@@ -2881,7 +3097,7 @@
           </a:bodyPr>
           <a:lstStyle/>
           <a:p>
-            <a:pPr marL="0" indent="0">
+            <a:pPr indent="0" marL="0">
               <a:buNone/>
             </a:pPr>
             <a:r>
@@ -2907,12 +3123,12 @@
         </p:nvSpPr>
         <p:spPr>
           <a:xfrm>
-            <a:off x="6016752" y="2240280"/>
-            <a:ext cx="2359152" cy="960120"/>
+            <a:off x="6016752" y="2057400"/>
+            <a:ext cx="2359152" cy="1051560"/>
           </a:xfrm>
           <a:prstGeom prst="roundRect">
             <a:avLst>
-              <a:gd name="adj" fmla="val 4762"/>
+              <a:gd name="adj" fmla="val 4348"/>
             </a:avLst>
           </a:prstGeom>
           <a:solidFill>
@@ -2925,13 +3141,6 @@
             <a:prstDash val="solid"/>
           </a:ln>
         </p:spPr>
-        <p:txBody>
-          <a:bodyPr/>
-          <a:lstStyle/>
-          <a:p>
-            <a:endParaRPr lang="zh-CN" altLang="en-US"/>
-          </a:p>
-        </p:txBody>
       </p:sp>
       <p:sp>
         <p:nvSpPr>
@@ -2941,7 +3150,7 @@
         </p:nvSpPr>
         <p:spPr>
           <a:xfrm>
-            <a:off x="6153912" y="2331720"/>
+            <a:off x="6153912" y="2148840"/>
             <a:ext cx="2084832" cy="182880"/>
           </a:xfrm>
           <a:prstGeom prst="rect">
@@ -2954,7 +3163,7 @@
           <a:bodyPr wrap="square" lIns="0" tIns="0" rIns="0" bIns="0" rtlCol="0" anchor="ctr"/>
           <a:lstStyle/>
           <a:p>
-            <a:pPr marL="0" indent="0">
+            <a:pPr indent="0" marL="0">
               <a:buNone/>
             </a:pPr>
             <a:r>
@@ -2980,8 +3189,8 @@
         </p:nvSpPr>
         <p:spPr>
           <a:xfrm>
-            <a:off x="6153912" y="2578608"/>
-            <a:ext cx="2084832" cy="530352"/>
+            <a:off x="6153912" y="2395728"/>
+            <a:ext cx="2084832" cy="621792"/>
           </a:xfrm>
           <a:prstGeom prst="rect">
             <a:avLst/>
@@ -2995,7 +3204,7 @@
           </a:bodyPr>
           <a:lstStyle/>
           <a:p>
-            <a:pPr marL="0" indent="0">
+            <a:pPr indent="0" marL="0">
               <a:buNone/>
             </a:pPr>
             <a:r>
@@ -3021,12 +3230,12 @@
         </p:nvSpPr>
         <p:spPr>
           <a:xfrm>
-            <a:off x="6016752" y="3474720"/>
-            <a:ext cx="2359152" cy="749808"/>
+            <a:off x="6016752" y="3200400"/>
+            <a:ext cx="2359152" cy="1051560"/>
           </a:xfrm>
           <a:prstGeom prst="roundRect">
             <a:avLst>
-              <a:gd name="adj" fmla="val 6098"/>
+              <a:gd name="adj" fmla="val 4348"/>
             </a:avLst>
           </a:prstGeom>
           <a:solidFill>
@@ -3039,13 +3248,6 @@
             <a:prstDash val="solid"/>
           </a:ln>
         </p:spPr>
-        <p:txBody>
-          <a:bodyPr/>
-          <a:lstStyle/>
-          <a:p>
-            <a:endParaRPr lang="zh-CN" altLang="en-US"/>
-          </a:p>
-        </p:txBody>
       </p:sp>
       <p:sp>
         <p:nvSpPr>
@@ -3055,7 +3257,7 @@
         </p:nvSpPr>
         <p:spPr>
           <a:xfrm>
-            <a:off x="6153912" y="3566160"/>
+            <a:off x="6153912" y="3291840"/>
             <a:ext cx="2084832" cy="182880"/>
           </a:xfrm>
           <a:prstGeom prst="rect">
@@ -3068,7 +3270,7 @@
           <a:bodyPr wrap="square" lIns="0" tIns="0" rIns="0" bIns="0" rtlCol="0" anchor="ctr"/>
           <a:lstStyle/>
           <a:p>
-            <a:pPr marL="0" indent="0">
+            <a:pPr indent="0" marL="0">
               <a:buNone/>
             </a:pPr>
             <a:r>
@@ -3094,8 +3296,8 @@
         </p:nvSpPr>
         <p:spPr>
           <a:xfrm>
-            <a:off x="6153912" y="3813048"/>
-            <a:ext cx="2084832" cy="320040"/>
+            <a:off x="6153912" y="3538728"/>
+            <a:ext cx="2084832" cy="621792"/>
           </a:xfrm>
           <a:prstGeom prst="rect">
             <a:avLst/>
@@ -3109,7 +3311,7 @@
           </a:bodyPr>
           <a:lstStyle/>
           <a:p>
-            <a:pPr marL="0" indent="0">
+            <a:pPr indent="0" marL="0">
               <a:buNone/>
             </a:pPr>
             <a:r>
@@ -3143,7 +3345,6 @@
         <a:solidFill>
           <a:srgbClr val="FFFFFF"/>
         </a:solidFill>
-        <a:effectLst/>
       </p:bgPr>
     </p:bg>
     <p:spTree>
@@ -3186,13 +3387,6 @@
             <a:prstDash val="solid"/>
           </a:ln>
         </p:spPr>
-        <p:txBody>
-          <a:bodyPr/>
-          <a:lstStyle/>
-          <a:p>
-            <a:endParaRPr lang="zh-CN" altLang="en-US"/>
-          </a:p>
-        </p:txBody>
       </p:sp>
       <p:sp>
         <p:nvSpPr>
@@ -3215,7 +3409,7 @@
           <a:bodyPr wrap="square" lIns="0" tIns="0" rIns="0" bIns="0" rtlCol="0" anchor="ctr"/>
           <a:lstStyle/>
           <a:p>
-            <a:pPr marL="0" indent="0">
+            <a:pPr indent="0" marL="0">
               <a:buNone/>
             </a:pPr>
             <a:r>
@@ -3254,7 +3448,7 @@
           <a:bodyPr wrap="square" lIns="0" tIns="0" rIns="0" bIns="0" rtlCol="0" anchor="ctr"/>
           <a:lstStyle/>
           <a:p>
-            <a:pPr marL="0" indent="0" algn="r">
+            <a:pPr algn="r" indent="0" marL="0">
               <a:buNone/>
             </a:pPr>
             <a:r>
@@ -3293,7 +3487,7 @@
           <a:bodyPr wrap="square" lIns="0" tIns="0" rIns="0" bIns="0" rtlCol="0" anchor="ctr"/>
           <a:lstStyle/>
           <a:p>
-            <a:pPr marL="0" indent="0">
+            <a:pPr indent="0" marL="0">
               <a:buNone/>
             </a:pPr>
             <a:r>
@@ -3332,7 +3526,7 @@
           <a:bodyPr wrap="square" lIns="0" tIns="0" rIns="0" bIns="0" rtlCol="0" anchor="ctr"/>
           <a:lstStyle/>
           <a:p>
-            <a:pPr marL="0" indent="0" algn="r">
+            <a:pPr algn="r" indent="0" marL="0">
               <a:buNone/>
             </a:pPr>
             <a:r>
@@ -3371,7 +3565,7 @@
           <a:bodyPr wrap="square" lIns="0" tIns="0" rIns="0" bIns="0" rtlCol="0" anchor="ctr"/>
           <a:lstStyle/>
           <a:p>
-            <a:pPr marL="0" indent="0">
+            <a:pPr indent="0" marL="0">
               <a:buNone/>
             </a:pPr>
             <a:r>
@@ -3415,13 +3609,6 @@
             <a:prstDash val="solid"/>
           </a:ln>
         </p:spPr>
-        <p:txBody>
-          <a:bodyPr/>
-          <a:lstStyle/>
-          <a:p>
-            <a:endParaRPr lang="zh-CN" altLang="en-US"/>
-          </a:p>
-        </p:txBody>
       </p:sp>
       <p:sp>
         <p:nvSpPr>
@@ -3444,7 +3631,7 @@
           <a:bodyPr wrap="square" lIns="0" tIns="0" rIns="0" bIns="0" rtlCol="0" anchor="ctr"/>
           <a:lstStyle/>
           <a:p>
-            <a:pPr marL="0" indent="0">
+            <a:pPr indent="0" marL="0">
               <a:buNone/>
             </a:pPr>
             <a:r>
@@ -3485,7 +3672,7 @@
           </a:bodyPr>
           <a:lstStyle/>
           <a:p>
-            <a:pPr marL="0" indent="0">
+            <a:pPr indent="0" marL="0">
               <a:buNone/>
             </a:pPr>
             <a:r>
@@ -3529,13 +3716,6 @@
             <a:prstDash val="solid"/>
           </a:ln>
         </p:spPr>
-        <p:txBody>
-          <a:bodyPr/>
-          <a:lstStyle/>
-          <a:p>
-            <a:endParaRPr lang="zh-CN" altLang="en-US"/>
-          </a:p>
-        </p:txBody>
       </p:sp>
       <p:sp>
         <p:nvSpPr>
@@ -3558,7 +3738,7 @@
           <a:bodyPr wrap="square" lIns="0" tIns="0" rIns="0" bIns="0" rtlCol="0" anchor="ctr"/>
           <a:lstStyle/>
           <a:p>
-            <a:pPr marL="0" indent="0">
+            <a:pPr indent="0" marL="0">
               <a:buNone/>
             </a:pPr>
             <a:r>
@@ -3599,7 +3779,7 @@
           </a:bodyPr>
           <a:lstStyle/>
           <a:p>
-            <a:pPr marL="0" indent="0">
+            <a:pPr indent="0" marL="0">
               <a:buNone/>
             </a:pPr>
             <a:r>
@@ -3643,13 +3823,6 @@
             <a:prstDash val="solid"/>
           </a:ln>
         </p:spPr>
-        <p:txBody>
-          <a:bodyPr/>
-          <a:lstStyle/>
-          <a:p>
-            <a:endParaRPr lang="zh-CN" altLang="en-US"/>
-          </a:p>
-        </p:txBody>
       </p:sp>
       <p:sp>
         <p:nvSpPr>
@@ -3672,7 +3845,7 @@
           <a:bodyPr wrap="square" lIns="0" tIns="0" rIns="0" bIns="0" rtlCol="0" anchor="ctr"/>
           <a:lstStyle/>
           <a:p>
-            <a:pPr marL="0" indent="0">
+            <a:pPr indent="0" marL="0">
               <a:buNone/>
             </a:pPr>
             <a:r>
@@ -3713,7 +3886,7 @@
           </a:bodyPr>
           <a:lstStyle/>
           <a:p>
-            <a:pPr marL="0" indent="0">
+            <a:pPr indent="0" marL="0">
               <a:buNone/>
             </a:pPr>
             <a:r>
@@ -3759,13 +3932,6 @@
             <a:prstDash val="solid"/>
           </a:ln>
         </p:spPr>
-        <p:txBody>
-          <a:bodyPr/>
-          <a:lstStyle/>
-          <a:p>
-            <a:endParaRPr lang="zh-CN" altLang="en-US"/>
-          </a:p>
-        </p:txBody>
       </p:sp>
       <p:sp>
         <p:nvSpPr>
@@ -3788,7 +3954,7 @@
           <a:bodyPr wrap="square" lIns="0" tIns="0" rIns="0" bIns="0" rtlCol="0" anchor="ctr"/>
           <a:lstStyle/>
           <a:p>
-            <a:pPr marL="0" indent="0">
+            <a:pPr indent="0" marL="0">
               <a:buNone/>
             </a:pPr>
             <a:r>
@@ -3829,7 +3995,7 @@
           </a:bodyPr>
           <a:lstStyle/>
           <a:p>
-            <a:pPr marL="0" indent="0">
+            <a:pPr indent="0" marL="0">
               <a:buNone/>
             </a:pPr>
             <a:r>
@@ -3863,7 +4029,6 @@
         <a:solidFill>
           <a:srgbClr val="F7F5F1"/>
         </a:solidFill>
-        <a:effectLst/>
       </p:bgPr>
     </p:bg>
     <p:spTree>
@@ -3906,13 +4071,6 @@
             <a:prstDash val="solid"/>
           </a:ln>
         </p:spPr>
-        <p:txBody>
-          <a:bodyPr/>
-          <a:lstStyle/>
-          <a:p>
-            <a:endParaRPr lang="zh-CN" altLang="en-US"/>
-          </a:p>
-        </p:txBody>
       </p:sp>
       <p:sp>
         <p:nvSpPr>
@@ -3935,7 +4093,7 @@
           <a:bodyPr wrap="square" lIns="0" tIns="0" rIns="0" bIns="0" rtlCol="0" anchor="ctr"/>
           <a:lstStyle/>
           <a:p>
-            <a:pPr marL="0" indent="0">
+            <a:pPr indent="0" marL="0">
               <a:buNone/>
             </a:pPr>
             <a:r>
@@ -3974,7 +4132,7 @@
           <a:bodyPr wrap="square" lIns="0" tIns="0" rIns="0" bIns="0" rtlCol="0" anchor="ctr"/>
           <a:lstStyle/>
           <a:p>
-            <a:pPr marL="0" indent="0" algn="r">
+            <a:pPr algn="r" indent="0" marL="0">
               <a:buNone/>
             </a:pPr>
             <a:r>
@@ -4013,7 +4171,7 @@
           <a:bodyPr wrap="square" lIns="0" tIns="0" rIns="0" bIns="0" rtlCol="0" anchor="ctr"/>
           <a:lstStyle/>
           <a:p>
-            <a:pPr marL="0" indent="0">
+            <a:pPr indent="0" marL="0">
               <a:buNone/>
             </a:pPr>
             <a:r>
@@ -4052,7 +4210,7 @@
           <a:bodyPr wrap="square" lIns="0" tIns="0" rIns="0" bIns="0" rtlCol="0" anchor="ctr"/>
           <a:lstStyle/>
           <a:p>
-            <a:pPr marL="0" indent="0" algn="r">
+            <a:pPr algn="r" indent="0" marL="0">
               <a:buNone/>
             </a:pPr>
             <a:r>
@@ -4072,14 +4230,14 @@
       </p:sp>
       <p:pic>
         <p:nvPicPr>
-          <p:cNvPr id="7" name="Image 0" descr="H:\project\OpenGU\GULib-master\report\0417_5003report\figures\report_figures\fig2_grapheraser_shard.png"/>
+          <p:cNvPr id="7" name="Image 0" descr="H:\project\OpenGU\GULib-master\report\0417_5003report\figures\report_figures\fig2_grapheraser_shard.png">    </p:cNvPr>
           <p:cNvPicPr>
             <a:picLocks noChangeAspect="1"/>
           </p:cNvPicPr>
           <p:nvPr/>
         </p:nvPicPr>
         <p:blipFill>
-          <a:blip r:embed="rId3"/>
+          <a:blip r:embed="rId1"/>
           <a:stretch>
             <a:fillRect/>
           </a:stretch>
@@ -4115,7 +4273,7 @@
           <a:bodyPr wrap="square" lIns="0" tIns="0" rIns="0" bIns="0" rtlCol="0" anchor="ctr"/>
           <a:lstStyle/>
           <a:p>
-            <a:pPr marL="0" indent="0">
+            <a:pPr indent="0" marL="0">
               <a:buNone/>
             </a:pPr>
             <a:r>
@@ -4141,12 +4299,12 @@
         </p:nvSpPr>
         <p:spPr>
           <a:xfrm>
-            <a:off x="5669280" y="1051560"/>
-            <a:ext cx="2697480" cy="896112"/>
+            <a:off x="5669280" y="1005840"/>
+            <a:ext cx="2697480" cy="1051560"/>
           </a:xfrm>
           <a:prstGeom prst="roundRect">
             <a:avLst>
-              <a:gd name="adj" fmla="val 5102"/>
+              <a:gd name="adj" fmla="val 4348"/>
             </a:avLst>
           </a:prstGeom>
           <a:solidFill>
@@ -4159,13 +4317,6 @@
             <a:prstDash val="solid"/>
           </a:ln>
         </p:spPr>
-        <p:txBody>
-          <a:bodyPr/>
-          <a:lstStyle/>
-          <a:p>
-            <a:endParaRPr lang="zh-CN" altLang="en-US"/>
-          </a:p>
-        </p:txBody>
       </p:sp>
       <p:sp>
         <p:nvSpPr>
@@ -4175,7 +4326,7 @@
         </p:nvSpPr>
         <p:spPr>
           <a:xfrm>
-            <a:off x="5806440" y="1143000"/>
+            <a:off x="5806440" y="1097280"/>
             <a:ext cx="2423160" cy="182880"/>
           </a:xfrm>
           <a:prstGeom prst="rect">
@@ -4188,7 +4339,7 @@
           <a:bodyPr wrap="square" lIns="0" tIns="0" rIns="0" bIns="0" rtlCol="0" anchor="ctr"/>
           <a:lstStyle/>
           <a:p>
-            <a:pPr marL="0" indent="0">
+            <a:pPr indent="0" marL="0">
               <a:buNone/>
             </a:pPr>
             <a:r>
@@ -4214,8 +4365,8 @@
         </p:nvSpPr>
         <p:spPr>
           <a:xfrm>
-            <a:off x="5806440" y="1389888"/>
-            <a:ext cx="2423160" cy="466344"/>
+            <a:off x="5806440" y="1344168"/>
+            <a:ext cx="2423160" cy="621792"/>
           </a:xfrm>
           <a:prstGeom prst="rect">
             <a:avLst/>
@@ -4229,7 +4380,7 @@
           </a:bodyPr>
           <a:lstStyle/>
           <a:p>
-            <a:pPr marL="0" indent="0">
+            <a:pPr indent="0" marL="0">
               <a:buNone/>
             </a:pPr>
             <a:r>
@@ -4256,11 +4407,11 @@
         <p:spPr>
           <a:xfrm>
             <a:off x="5669280" y="2148840"/>
-            <a:ext cx="2697480" cy="1060704"/>
+            <a:ext cx="2697480" cy="1051560"/>
           </a:xfrm>
           <a:prstGeom prst="roundRect">
             <a:avLst>
-              <a:gd name="adj" fmla="val 4310"/>
+              <a:gd name="adj" fmla="val 4348"/>
             </a:avLst>
           </a:prstGeom>
           <a:solidFill>
@@ -4273,13 +4424,6 @@
             <a:prstDash val="solid"/>
           </a:ln>
         </p:spPr>
-        <p:txBody>
-          <a:bodyPr/>
-          <a:lstStyle/>
-          <a:p>
-            <a:endParaRPr lang="zh-CN" altLang="en-US"/>
-          </a:p>
-        </p:txBody>
       </p:sp>
       <p:sp>
         <p:nvSpPr>
@@ -4302,7 +4446,7 @@
           <a:bodyPr wrap="square" lIns="0" tIns="0" rIns="0" bIns="0" rtlCol="0" anchor="ctr"/>
           <a:lstStyle/>
           <a:p>
-            <a:pPr marL="0" indent="0">
+            <a:pPr indent="0" marL="0">
               <a:buNone/>
             </a:pPr>
             <a:r>
@@ -4329,7 +4473,7 @@
         <p:spPr>
           <a:xfrm>
             <a:off x="5806440" y="2487168"/>
-            <a:ext cx="2423160" cy="630936"/>
+            <a:ext cx="2423160" cy="621792"/>
           </a:xfrm>
           <a:prstGeom prst="rect">
             <a:avLst/>
@@ -4343,7 +4487,7 @@
           </a:bodyPr>
           <a:lstStyle/>
           <a:p>
-            <a:pPr marL="0" indent="0">
+            <a:pPr indent="0" marL="0">
               <a:buNone/>
             </a:pPr>
             <a:r>
@@ -4369,12 +4513,12 @@
         </p:nvSpPr>
         <p:spPr>
           <a:xfrm>
-            <a:off x="5669280" y="3520440"/>
-            <a:ext cx="2697480" cy="868680"/>
+            <a:off x="5669280" y="3291840"/>
+            <a:ext cx="2697480" cy="960120"/>
           </a:xfrm>
           <a:prstGeom prst="roundRect">
             <a:avLst>
-              <a:gd name="adj" fmla="val 5263"/>
+              <a:gd name="adj" fmla="val 4762"/>
             </a:avLst>
           </a:prstGeom>
           <a:solidFill>
@@ -4387,13 +4531,6 @@
             <a:prstDash val="solid"/>
           </a:ln>
         </p:spPr>
-        <p:txBody>
-          <a:bodyPr/>
-          <a:lstStyle/>
-          <a:p>
-            <a:endParaRPr lang="zh-CN" altLang="en-US"/>
-          </a:p>
-        </p:txBody>
       </p:sp>
       <p:sp>
         <p:nvSpPr>
@@ -4403,7 +4540,7 @@
         </p:nvSpPr>
         <p:spPr>
           <a:xfrm>
-            <a:off x="5806440" y="3611880"/>
+            <a:off x="5806440" y="3383280"/>
             <a:ext cx="2423160" cy="182880"/>
           </a:xfrm>
           <a:prstGeom prst="rect">
@@ -4416,7 +4553,7 @@
           <a:bodyPr wrap="square" lIns="0" tIns="0" rIns="0" bIns="0" rtlCol="0" anchor="ctr"/>
           <a:lstStyle/>
           <a:p>
-            <a:pPr marL="0" indent="0">
+            <a:pPr indent="0" marL="0">
               <a:buNone/>
             </a:pPr>
             <a:r>
@@ -4442,8 +4579,8 @@
         </p:nvSpPr>
         <p:spPr>
           <a:xfrm>
-            <a:off x="5806440" y="3858768"/>
-            <a:ext cx="2423160" cy="438912"/>
+            <a:off x="5806440" y="3630168"/>
+            <a:ext cx="2423160" cy="530352"/>
           </a:xfrm>
           <a:prstGeom prst="rect">
             <a:avLst/>
@@ -4457,7 +4594,7 @@
           </a:bodyPr>
           <a:lstStyle/>
           <a:p>
-            <a:pPr marL="0" indent="0">
+            <a:pPr indent="0" marL="0">
               <a:buNone/>
             </a:pPr>
             <a:r>
@@ -4491,7 +4628,6 @@
         <a:solidFill>
           <a:srgbClr val="FFFFFF"/>
         </a:solidFill>
-        <a:effectLst/>
       </p:bgPr>
     </p:bg>
     <p:spTree>
@@ -4534,13 +4670,6 @@
             <a:prstDash val="solid"/>
           </a:ln>
         </p:spPr>
-        <p:txBody>
-          <a:bodyPr/>
-          <a:lstStyle/>
-          <a:p>
-            <a:endParaRPr lang="zh-CN" altLang="en-US"/>
-          </a:p>
-        </p:txBody>
       </p:sp>
       <p:sp>
         <p:nvSpPr>
@@ -4563,7 +4692,7 @@
           <a:bodyPr wrap="square" lIns="0" tIns="0" rIns="0" bIns="0" rtlCol="0" anchor="ctr"/>
           <a:lstStyle/>
           <a:p>
-            <a:pPr marL="0" indent="0">
+            <a:pPr indent="0" marL="0">
               <a:buNone/>
             </a:pPr>
             <a:r>
@@ -4602,7 +4731,7 @@
           <a:bodyPr wrap="square" lIns="0" tIns="0" rIns="0" bIns="0" rtlCol="0" anchor="ctr"/>
           <a:lstStyle/>
           <a:p>
-            <a:pPr marL="0" indent="0" algn="r">
+            <a:pPr algn="r" indent="0" marL="0">
               <a:buNone/>
             </a:pPr>
             <a:r>
@@ -4641,7 +4770,7 @@
           <a:bodyPr wrap="square" lIns="0" tIns="0" rIns="0" bIns="0" rtlCol="0" anchor="ctr"/>
           <a:lstStyle/>
           <a:p>
-            <a:pPr marL="0" indent="0">
+            <a:pPr indent="0" marL="0">
               <a:buNone/>
             </a:pPr>
             <a:r>
@@ -4680,7 +4809,7 @@
           <a:bodyPr wrap="square" lIns="0" tIns="0" rIns="0" bIns="0" rtlCol="0" anchor="ctr"/>
           <a:lstStyle/>
           <a:p>
-            <a:pPr marL="0" indent="0" algn="r">
+            <a:pPr algn="r" indent="0" marL="0">
               <a:buNone/>
             </a:pPr>
             <a:r>
@@ -4700,14 +4829,14 @@
       </p:sp>
       <p:pic>
         <p:nvPicPr>
-          <p:cNvPr id="7" name="Image 0" descr="H:\project\OpenGU\GULib-master\report\0417_5003report\figures\paper_figures\FIG-4a_Significance.png"/>
+          <p:cNvPr id="7" name="Image 0" descr="H:\project\OpenGU\GULib-master\report\0417_5003report\figures\paper_figures\FIG-4a_Significance.png">    </p:cNvPr>
           <p:cNvPicPr>
             <a:picLocks noChangeAspect="1"/>
           </p:cNvPicPr>
           <p:nvPr/>
         </p:nvPicPr>
         <p:blipFill>
-          <a:blip r:embed="rId3"/>
+          <a:blip r:embed="rId1"/>
           <a:stretch>
             <a:fillRect/>
           </a:stretch>
@@ -4715,7 +4844,7 @@
         <p:spPr>
           <a:xfrm>
             <a:off x="530352" y="932688"/>
-            <a:ext cx="3794760" cy="3035808"/>
+            <a:ext cx="3794760" cy="2788920"/>
           </a:xfrm>
           <a:prstGeom prst="rect">
             <a:avLst/>
@@ -4724,14 +4853,14 @@
       </p:pic>
       <p:pic>
         <p:nvPicPr>
-          <p:cNvPr id="8" name="Image 1" descr="H:\project\OpenGU\GULib-master\report\0417_5003report\figures\paper_figures\FIG-4b_Effect.png"/>
+          <p:cNvPr id="8" name="Image 1" descr="H:\project\OpenGU\GULib-master\report\0417_5003report\figures\paper_figures\FIG-4b_Effect.png">    </p:cNvPr>
           <p:cNvPicPr>
             <a:picLocks noChangeAspect="1"/>
           </p:cNvPicPr>
           <p:nvPr/>
         </p:nvPicPr>
         <p:blipFill>
-          <a:blip r:embed="rId4"/>
+          <a:blip r:embed="rId2"/>
           <a:stretch>
             <a:fillRect/>
           </a:stretch>
@@ -4739,7 +4868,7 @@
         <p:spPr>
           <a:xfrm>
             <a:off x="4754880" y="932688"/>
-            <a:ext cx="3794760" cy="3035808"/>
+            <a:ext cx="3794760" cy="2788920"/>
           </a:xfrm>
           <a:prstGeom prst="rect">
             <a:avLst/>
@@ -4754,7 +4883,7 @@
         </p:nvSpPr>
         <p:spPr>
           <a:xfrm>
-            <a:off x="548640" y="4078224"/>
+            <a:off x="548640" y="3794760"/>
             <a:ext cx="3730752" cy="146304"/>
           </a:xfrm>
           <a:prstGeom prst="rect">
@@ -4767,7 +4896,7 @@
           <a:bodyPr wrap="square" lIns="0" tIns="0" rIns="0" bIns="0" rtlCol="0" anchor="ctr"/>
           <a:lstStyle/>
           <a:p>
-            <a:pPr marL="0" indent="0">
+            <a:pPr indent="0" marL="0">
               <a:buNone/>
             </a:pPr>
             <a:r>
@@ -4793,7 +4922,7 @@
         </p:nvSpPr>
         <p:spPr>
           <a:xfrm>
-            <a:off x="4773168" y="4078224"/>
+            <a:off x="4773168" y="3794760"/>
             <a:ext cx="3730752" cy="146304"/>
           </a:xfrm>
           <a:prstGeom prst="rect">
@@ -4806,7 +4935,7 @@
           <a:bodyPr wrap="square" lIns="0" tIns="0" rIns="0" bIns="0" rtlCol="0" anchor="ctr"/>
           <a:lstStyle/>
           <a:p>
-            <a:pPr marL="0" indent="0">
+            <a:pPr indent="0" marL="0">
               <a:buNone/>
             </a:pPr>
             <a:r>
@@ -4832,12 +4961,12 @@
         </p:nvSpPr>
         <p:spPr>
           <a:xfrm>
-            <a:off x="822960" y="4370832"/>
-            <a:ext cx="3246120" cy="384048"/>
+            <a:off x="822960" y="4023360"/>
+            <a:ext cx="3246120" cy="685800"/>
           </a:xfrm>
           <a:prstGeom prst="roundRect">
             <a:avLst>
-              <a:gd name="adj" fmla="val 11905"/>
+              <a:gd name="adj" fmla="val 6667"/>
             </a:avLst>
           </a:prstGeom>
           <a:solidFill>
@@ -4850,13 +4979,6 @@
             <a:prstDash val="solid"/>
           </a:ln>
         </p:spPr>
-        <p:txBody>
-          <a:bodyPr/>
-          <a:lstStyle/>
-          <a:p>
-            <a:endParaRPr lang="zh-CN" altLang="en-US"/>
-          </a:p>
-        </p:txBody>
       </p:sp>
       <p:sp>
         <p:nvSpPr>
@@ -4866,7 +4988,7 @@
         </p:nvSpPr>
         <p:spPr>
           <a:xfrm>
-            <a:off x="960120" y="4462272"/>
+            <a:off x="960120" y="4114800"/>
             <a:ext cx="2971800" cy="182880"/>
           </a:xfrm>
           <a:prstGeom prst="rect">
@@ -4879,7 +5001,7 @@
           <a:bodyPr wrap="square" lIns="0" tIns="0" rIns="0" bIns="0" rtlCol="0" anchor="ctr"/>
           <a:lstStyle/>
           <a:p>
-            <a:pPr marL="0" indent="0">
+            <a:pPr indent="0" marL="0">
               <a:buNone/>
             </a:pPr>
             <a:r>
@@ -4905,8 +5027,8 @@
         </p:nvSpPr>
         <p:spPr>
           <a:xfrm>
-            <a:off x="960120" y="4709160"/>
-            <a:ext cx="2971800" cy="0"/>
+            <a:off x="960120" y="4361688"/>
+            <a:ext cx="2971800" cy="256032"/>
           </a:xfrm>
           <a:prstGeom prst="rect">
             <a:avLst/>
@@ -4920,7 +5042,7 @@
           </a:bodyPr>
           <a:lstStyle/>
           <a:p>
-            <a:pPr marL="0" indent="0">
+            <a:pPr indent="0" marL="0">
               <a:buNone/>
             </a:pPr>
             <a:r>
@@ -4946,12 +5068,12 @@
         </p:nvSpPr>
         <p:spPr>
           <a:xfrm>
-            <a:off x="4983480" y="4370832"/>
-            <a:ext cx="3246120" cy="384048"/>
+            <a:off x="4983480" y="4023360"/>
+            <a:ext cx="3246120" cy="685800"/>
           </a:xfrm>
           <a:prstGeom prst="roundRect">
             <a:avLst>
-              <a:gd name="adj" fmla="val 11905"/>
+              <a:gd name="adj" fmla="val 6667"/>
             </a:avLst>
           </a:prstGeom>
           <a:solidFill>
@@ -4964,13 +5086,6 @@
             <a:prstDash val="solid"/>
           </a:ln>
         </p:spPr>
-        <p:txBody>
-          <a:bodyPr/>
-          <a:lstStyle/>
-          <a:p>
-            <a:endParaRPr lang="zh-CN" altLang="en-US"/>
-          </a:p>
-        </p:txBody>
       </p:sp>
       <p:sp>
         <p:nvSpPr>
@@ -4980,7 +5095,7 @@
         </p:nvSpPr>
         <p:spPr>
           <a:xfrm>
-            <a:off x="5120640" y="4462272"/>
+            <a:off x="5120640" y="4114800"/>
             <a:ext cx="2971800" cy="182880"/>
           </a:xfrm>
           <a:prstGeom prst="rect">
@@ -4993,7 +5108,7 @@
           <a:bodyPr wrap="square" lIns="0" tIns="0" rIns="0" bIns="0" rtlCol="0" anchor="ctr"/>
           <a:lstStyle/>
           <a:p>
-            <a:pPr marL="0" indent="0">
+            <a:pPr indent="0" marL="0">
               <a:buNone/>
             </a:pPr>
             <a:r>
@@ -5019,8 +5134,8 @@
         </p:nvSpPr>
         <p:spPr>
           <a:xfrm>
-            <a:off x="5120640" y="4709160"/>
-            <a:ext cx="2971800" cy="0"/>
+            <a:off x="5120640" y="4361688"/>
+            <a:ext cx="2971800" cy="256032"/>
           </a:xfrm>
           <a:prstGeom prst="rect">
             <a:avLst/>
@@ -5034,7 +5149,7 @@
           </a:bodyPr>
           <a:lstStyle/>
           <a:p>
-            <a:pPr marL="0" indent="0">
+            <a:pPr indent="0" marL="0">
               <a:buNone/>
             </a:pPr>
             <a:r>
@@ -5068,7 +5183,6 @@
         <a:solidFill>
           <a:srgbClr val="F7F5F1"/>
         </a:solidFill>
-        <a:effectLst/>
       </p:bgPr>
     </p:bg>
     <p:spTree>
@@ -5111,13 +5225,6 @@
             <a:prstDash val="solid"/>
           </a:ln>
         </p:spPr>
-        <p:txBody>
-          <a:bodyPr/>
-          <a:lstStyle/>
-          <a:p>
-            <a:endParaRPr lang="zh-CN" altLang="en-US"/>
-          </a:p>
-        </p:txBody>
       </p:sp>
       <p:sp>
         <p:nvSpPr>
@@ -5140,7 +5247,7 @@
           <a:bodyPr wrap="square" lIns="0" tIns="0" rIns="0" bIns="0" rtlCol="0" anchor="ctr"/>
           <a:lstStyle/>
           <a:p>
-            <a:pPr marL="0" indent="0">
+            <a:pPr indent="0" marL="0">
               <a:buNone/>
             </a:pPr>
             <a:r>
@@ -5179,7 +5286,7 @@
           <a:bodyPr wrap="square" lIns="0" tIns="0" rIns="0" bIns="0" rtlCol="0" anchor="ctr"/>
           <a:lstStyle/>
           <a:p>
-            <a:pPr marL="0" indent="0" algn="r">
+            <a:pPr algn="r" indent="0" marL="0">
               <a:buNone/>
             </a:pPr>
             <a:r>
@@ -5218,7 +5325,7 @@
           <a:bodyPr wrap="square" lIns="0" tIns="0" rIns="0" bIns="0" rtlCol="0" anchor="ctr"/>
           <a:lstStyle/>
           <a:p>
-            <a:pPr marL="0" indent="0">
+            <a:pPr indent="0" marL="0">
               <a:buNone/>
             </a:pPr>
             <a:r>
@@ -5257,7 +5364,7 @@
           <a:bodyPr wrap="square" lIns="0" tIns="0" rIns="0" bIns="0" rtlCol="0" anchor="ctr"/>
           <a:lstStyle/>
           <a:p>
-            <a:pPr marL="0" indent="0" algn="r">
+            <a:pPr algn="r" indent="0" marL="0">
               <a:buNone/>
             </a:pPr>
             <a:r>
@@ -5296,7 +5403,7 @@
           <a:bodyPr wrap="square" lIns="0" tIns="0" rIns="0" bIns="0" rtlCol="0" anchor="ctr"/>
           <a:lstStyle/>
           <a:p>
-            <a:pPr marL="0" indent="0">
+            <a:pPr indent="0" marL="0">
               <a:buNone/>
             </a:pPr>
             <a:r>
@@ -5340,13 +5447,6 @@
             <a:prstDash val="solid"/>
           </a:ln>
         </p:spPr>
-        <p:txBody>
-          <a:bodyPr/>
-          <a:lstStyle/>
-          <a:p>
-            <a:endParaRPr lang="zh-CN" altLang="en-US"/>
-          </a:p>
-        </p:txBody>
       </p:sp>
       <p:sp>
         <p:nvSpPr>
@@ -5369,7 +5469,7 @@
           <a:bodyPr wrap="square" lIns="0" tIns="0" rIns="0" bIns="0" rtlCol="0" anchor="ctr"/>
           <a:lstStyle/>
           <a:p>
-            <a:pPr marL="0" indent="0">
+            <a:pPr indent="0" marL="0">
               <a:buNone/>
             </a:pPr>
             <a:r>
@@ -5410,7 +5510,7 @@
           </a:bodyPr>
           <a:lstStyle/>
           <a:p>
-            <a:pPr marL="0" indent="0">
+            <a:pPr indent="0" marL="0">
               <a:buNone/>
             </a:pPr>
             <a:r>
@@ -5454,13 +5554,6 @@
             <a:prstDash val="solid"/>
           </a:ln>
         </p:spPr>
-        <p:txBody>
-          <a:bodyPr/>
-          <a:lstStyle/>
-          <a:p>
-            <a:endParaRPr lang="zh-CN" altLang="en-US"/>
-          </a:p>
-        </p:txBody>
       </p:sp>
       <p:sp>
         <p:nvSpPr>
@@ -5483,7 +5576,7 @@
           <a:bodyPr wrap="square" lIns="0" tIns="0" rIns="0" bIns="0" rtlCol="0" anchor="ctr"/>
           <a:lstStyle/>
           <a:p>
-            <a:pPr marL="0" indent="0">
+            <a:pPr indent="0" marL="0">
               <a:buNone/>
             </a:pPr>
             <a:r>
@@ -5524,7 +5617,7 @@
           </a:bodyPr>
           <a:lstStyle/>
           <a:p>
-            <a:pPr marL="0" indent="0">
+            <a:pPr indent="0" marL="0">
               <a:buNone/>
             </a:pPr>
             <a:r>
@@ -5568,13 +5661,6 @@
             <a:prstDash val="solid"/>
           </a:ln>
         </p:spPr>
-        <p:txBody>
-          <a:bodyPr/>
-          <a:lstStyle/>
-          <a:p>
-            <a:endParaRPr lang="zh-CN" altLang="en-US"/>
-          </a:p>
-        </p:txBody>
       </p:sp>
       <p:sp>
         <p:nvSpPr>
@@ -5597,7 +5683,7 @@
           <a:bodyPr wrap="square" lIns="0" tIns="0" rIns="0" bIns="0" rtlCol="0" anchor="ctr"/>
           <a:lstStyle/>
           <a:p>
-            <a:pPr marL="0" indent="0">
+            <a:pPr indent="0" marL="0">
               <a:buNone/>
             </a:pPr>
             <a:r>
@@ -5638,7 +5724,7 @@
           </a:bodyPr>
           <a:lstStyle/>
           <a:p>
-            <a:pPr marL="0" indent="0">
+            <a:pPr indent="0" marL="0">
               <a:buNone/>
             </a:pPr>
             <a:r>
@@ -5682,13 +5768,6 @@
             <a:prstDash val="solid"/>
           </a:ln>
         </p:spPr>
-        <p:txBody>
-          <a:bodyPr/>
-          <a:lstStyle/>
-          <a:p>
-            <a:endParaRPr lang="zh-CN" altLang="en-US"/>
-          </a:p>
-        </p:txBody>
       </p:sp>
       <p:sp>
         <p:nvSpPr>
@@ -5711,7 +5790,7 @@
           <a:bodyPr wrap="square" lIns="0" tIns="0" rIns="0" bIns="0" rtlCol="0" anchor="ctr"/>
           <a:lstStyle/>
           <a:p>
-            <a:pPr marL="0" indent="0">
+            <a:pPr indent="0" marL="0">
               <a:buNone/>
             </a:pPr>
             <a:r>
@@ -5752,7 +5831,7 @@
           </a:bodyPr>
           <a:lstStyle/>
           <a:p>
-            <a:pPr marL="0" indent="0">
+            <a:pPr indent="0" marL="0">
               <a:buNone/>
             </a:pPr>
             <a:r>
@@ -5798,13 +5877,6 @@
             <a:prstDash val="solid"/>
           </a:ln>
         </p:spPr>
-        <p:txBody>
-          <a:bodyPr/>
-          <a:lstStyle/>
-          <a:p>
-            <a:endParaRPr lang="zh-CN" altLang="en-US"/>
-          </a:p>
-        </p:txBody>
       </p:sp>
       <p:sp>
         <p:nvSpPr>
@@ -5827,7 +5899,7 @@
           <a:bodyPr wrap="square" lIns="0" tIns="0" rIns="0" bIns="0" rtlCol="0" anchor="ctr"/>
           <a:lstStyle/>
           <a:p>
-            <a:pPr marL="0" indent="0">
+            <a:pPr indent="0" marL="0">
               <a:buNone/>
             </a:pPr>
             <a:r>
@@ -5868,7 +5940,7 @@
           </a:bodyPr>
           <a:lstStyle/>
           <a:p>
-            <a:pPr marL="0" indent="0">
+            <a:pPr indent="0" marL="0">
               <a:buNone/>
             </a:pPr>
             <a:r>
@@ -5885,7 +5957,7 @@
             <a:endParaRPr lang="en-US" sz="1040" dirty="0"/>
           </a:p>
           <a:p>
-            <a:pPr marL="0" indent="0">
+            <a:pPr indent="0" marL="0">
               <a:buNone/>
             </a:pPr>
             <a:r>
@@ -5919,7 +5991,6 @@
         <a:solidFill>
           <a:srgbClr val="16263F"/>
         </a:solidFill>
-        <a:effectLst/>
       </p:bgPr>
     </p:bg>
     <p:spTree>
@@ -5957,7 +6028,7 @@
           <a:bodyPr wrap="square" lIns="0" tIns="0" rIns="0" bIns="0" rtlCol="0" anchor="ctr"/>
           <a:lstStyle/>
           <a:p>
-            <a:pPr marL="0" indent="0">
+            <a:pPr indent="0" marL="0">
               <a:buNone/>
             </a:pPr>
             <a:r>
@@ -6001,13 +6072,6 @@
             <a:prstDash val="solid"/>
           </a:ln>
         </p:spPr>
-        <p:txBody>
-          <a:bodyPr/>
-          <a:lstStyle/>
-          <a:p>
-            <a:endParaRPr lang="zh-CN" altLang="en-US"/>
-          </a:p>
-        </p:txBody>
       </p:sp>
       <p:sp>
         <p:nvSpPr>
@@ -6030,7 +6094,7 @@
           <a:bodyPr wrap="square" lIns="0" tIns="0" rIns="0" bIns="0" rtlCol="0" anchor="ctr"/>
           <a:lstStyle/>
           <a:p>
-            <a:pPr marL="0" indent="0">
+            <a:pPr indent="0" marL="0">
               <a:buNone/>
             </a:pPr>
             <a:r>
@@ -6071,7 +6135,7 @@
           </a:bodyPr>
           <a:lstStyle/>
           <a:p>
-            <a:pPr marL="0" indent="0">
+            <a:pPr indent="0" marL="0">
               <a:buNone/>
             </a:pPr>
             <a:r>
@@ -6115,13 +6179,6 @@
             <a:prstDash val="solid"/>
           </a:ln>
         </p:spPr>
-        <p:txBody>
-          <a:bodyPr/>
-          <a:lstStyle/>
-          <a:p>
-            <a:endParaRPr lang="zh-CN" altLang="en-US"/>
-          </a:p>
-        </p:txBody>
       </p:sp>
       <p:sp>
         <p:nvSpPr>
@@ -6144,7 +6201,7 @@
           <a:bodyPr wrap="square" lIns="0" tIns="0" rIns="0" bIns="0" rtlCol="0" anchor="ctr"/>
           <a:lstStyle/>
           <a:p>
-            <a:pPr marL="0" indent="0">
+            <a:pPr indent="0" marL="0">
               <a:buNone/>
             </a:pPr>
             <a:r>
@@ -6185,7 +6242,7 @@
           </a:bodyPr>
           <a:lstStyle/>
           <a:p>
-            <a:pPr marL="0" indent="0">
+            <a:pPr indent="0" marL="0">
               <a:buNone/>
             </a:pPr>
             <a:r>
@@ -6229,13 +6286,6 @@
             <a:prstDash val="solid"/>
           </a:ln>
         </p:spPr>
-        <p:txBody>
-          <a:bodyPr/>
-          <a:lstStyle/>
-          <a:p>
-            <a:endParaRPr lang="zh-CN" altLang="en-US"/>
-          </a:p>
-        </p:txBody>
       </p:sp>
       <p:sp>
         <p:nvSpPr>
@@ -6258,7 +6308,7 @@
           <a:bodyPr wrap="square" lIns="0" tIns="0" rIns="0" bIns="0" rtlCol="0" anchor="ctr"/>
           <a:lstStyle/>
           <a:p>
-            <a:pPr marL="0" indent="0">
+            <a:pPr indent="0" marL="0">
               <a:buNone/>
             </a:pPr>
             <a:r>
@@ -6299,7 +6349,7 @@
           </a:bodyPr>
           <a:lstStyle/>
           <a:p>
-            <a:pPr marL="0" indent="0">
+            <a:pPr indent="0" marL="0">
               <a:buNone/>
             </a:pPr>
             <a:r>
@@ -6338,7 +6388,7 @@
           <a:bodyPr wrap="square" lIns="0" tIns="0" rIns="0" bIns="0" rtlCol="0" anchor="ctr"/>
           <a:lstStyle/>
           <a:p>
-            <a:pPr marL="0" indent="0" algn="ctr">
+            <a:pPr algn="ctr" indent="0" marL="0">
               <a:buNone/>
             </a:pPr>
             <a:r>
@@ -6377,7 +6427,7 @@
           <a:bodyPr wrap="square" lIns="0" tIns="0" rIns="0" bIns="0" rtlCol="0" anchor="ctr"/>
           <a:lstStyle/>
           <a:p>
-            <a:pPr marL="0" indent="0">
+            <a:pPr indent="0" marL="0">
               <a:buNone/>
             </a:pPr>
             <a:r>
@@ -6411,7 +6461,6 @@
         <a:solidFill>
           <a:srgbClr val="F7F5F1"/>
         </a:solidFill>
-        <a:effectLst/>
       </p:bgPr>
     </p:bg>
     <p:spTree>
@@ -6454,13 +6503,6 @@
             <a:prstDash val="solid"/>
           </a:ln>
         </p:spPr>
-        <p:txBody>
-          <a:bodyPr/>
-          <a:lstStyle/>
-          <a:p>
-            <a:endParaRPr lang="zh-CN" altLang="en-US"/>
-          </a:p>
-        </p:txBody>
       </p:sp>
       <p:sp>
         <p:nvSpPr>
@@ -6483,7 +6525,7 @@
           <a:bodyPr wrap="square" lIns="0" tIns="0" rIns="0" bIns="0" rtlCol="0" anchor="ctr"/>
           <a:lstStyle/>
           <a:p>
-            <a:pPr marL="0" indent="0">
+            <a:pPr indent="0" marL="0">
               <a:buNone/>
             </a:pPr>
             <a:r>
@@ -6522,7 +6564,7 @@
           <a:bodyPr wrap="square" lIns="0" tIns="0" rIns="0" bIns="0" rtlCol="0" anchor="ctr"/>
           <a:lstStyle/>
           <a:p>
-            <a:pPr marL="0" indent="0" algn="r">
+            <a:pPr algn="r" indent="0" marL="0">
               <a:buNone/>
             </a:pPr>
             <a:r>
@@ -6561,7 +6603,7 @@
           <a:bodyPr wrap="square" lIns="0" tIns="0" rIns="0" bIns="0" rtlCol="0" anchor="ctr"/>
           <a:lstStyle/>
           <a:p>
-            <a:pPr marL="0" indent="0">
+            <a:pPr indent="0" marL="0">
               <a:buNone/>
             </a:pPr>
             <a:r>
@@ -6600,7 +6642,7 @@
           <a:bodyPr wrap="square" lIns="0" tIns="0" rIns="0" bIns="0" rtlCol="0" anchor="ctr"/>
           <a:lstStyle/>
           <a:p>
-            <a:pPr marL="0" indent="0" algn="r">
+            <a:pPr algn="r" indent="0" marL="0">
               <a:buNone/>
             </a:pPr>
             <a:r>
@@ -6641,7 +6683,7 @@
           </a:bodyPr>
           <a:lstStyle/>
           <a:p>
-            <a:pPr marL="0" indent="0">
+            <a:pPr indent="0" marL="0">
               <a:buNone/>
             </a:pPr>
             <a:r>
@@ -6685,13 +6727,6 @@
             <a:prstDash val="solid"/>
           </a:ln>
         </p:spPr>
-        <p:txBody>
-          <a:bodyPr/>
-          <a:lstStyle/>
-          <a:p>
-            <a:endParaRPr lang="zh-CN" altLang="en-US"/>
-          </a:p>
-        </p:txBody>
       </p:sp>
       <p:sp>
         <p:nvSpPr>
@@ -6716,7 +6751,7 @@
           </a:bodyPr>
           <a:lstStyle/>
           <a:p>
-            <a:pPr marL="0" indent="0">
+            <a:pPr indent="0" marL="0">
               <a:buNone/>
             </a:pPr>
             <a:r>
@@ -6757,7 +6792,7 @@
           </a:bodyPr>
           <a:lstStyle/>
           <a:p>
-            <a:pPr marL="0" indent="0">
+            <a:pPr indent="0" marL="0">
               <a:buNone/>
             </a:pPr>
             <a:r>
@@ -6801,13 +6836,6 @@
             <a:prstDash val="solid"/>
           </a:ln>
         </p:spPr>
-        <p:txBody>
-          <a:bodyPr/>
-          <a:lstStyle/>
-          <a:p>
-            <a:endParaRPr lang="zh-CN" altLang="en-US"/>
-          </a:p>
-        </p:txBody>
       </p:sp>
       <p:sp>
         <p:nvSpPr>
@@ -6832,7 +6860,7 @@
           </a:bodyPr>
           <a:lstStyle/>
           <a:p>
-            <a:pPr marL="0" indent="0">
+            <a:pPr indent="0" marL="0">
               <a:buNone/>
             </a:pPr>
             <a:r>
@@ -6849,7 +6877,7 @@
             <a:endParaRPr lang="en-US" sz="1580" dirty="0"/>
           </a:p>
           <a:p>
-            <a:pPr marL="0" indent="0">
+            <a:pPr indent="0" marL="0">
               <a:buNone/>
             </a:pPr>
             <a:r>
@@ -6890,7 +6918,7 @@
           </a:bodyPr>
           <a:lstStyle/>
           <a:p>
-            <a:pPr marL="0" indent="0">
+            <a:pPr indent="0" marL="0">
               <a:buNone/>
             </a:pPr>
             <a:r>
@@ -6934,13 +6962,6 @@
             <a:prstDash val="solid"/>
           </a:ln>
         </p:spPr>
-        <p:txBody>
-          <a:bodyPr/>
-          <a:lstStyle/>
-          <a:p>
-            <a:endParaRPr lang="zh-CN" altLang="en-US"/>
-          </a:p>
-        </p:txBody>
       </p:sp>
       <p:sp>
         <p:nvSpPr>
@@ -6965,7 +6986,7 @@
           </a:bodyPr>
           <a:lstStyle/>
           <a:p>
-            <a:pPr marL="0" indent="0">
+            <a:pPr indent="0" marL="0">
               <a:buNone/>
             </a:pPr>
             <a:r>
@@ -7006,7 +7027,7 @@
           </a:bodyPr>
           <a:lstStyle/>
           <a:p>
-            <a:pPr marL="0" indent="0">
+            <a:pPr indent="0" marL="0">
               <a:buNone/>
             </a:pPr>
             <a:r>
@@ -7052,13 +7073,6 @@
             <a:prstDash val="solid"/>
           </a:ln>
         </p:spPr>
-        <p:txBody>
-          <a:bodyPr/>
-          <a:lstStyle/>
-          <a:p>
-            <a:endParaRPr lang="zh-CN" altLang="en-US"/>
-          </a:p>
-        </p:txBody>
       </p:sp>
       <p:sp>
         <p:nvSpPr>
@@ -7081,7 +7095,7 @@
           <a:bodyPr wrap="square" lIns="0" tIns="0" rIns="0" bIns="0" rtlCol="0" anchor="ctr"/>
           <a:lstStyle/>
           <a:p>
-            <a:pPr marL="0" indent="0" algn="ctr">
+            <a:pPr algn="ctr" indent="0" marL="0">
               <a:buNone/>
             </a:pPr>
             <a:r>
@@ -7122,7 +7136,7 @@
           </a:bodyPr>
           <a:lstStyle/>
           <a:p>
-            <a:pPr marL="0" indent="0" algn="ctr">
+            <a:pPr algn="ctr" indent="0" marL="0">
               <a:buNone/>
             </a:pPr>
             <a:r>
@@ -7156,7 +7170,6 @@
         <a:solidFill>
           <a:srgbClr val="FFFFFF"/>
         </a:solidFill>
-        <a:effectLst/>
       </p:bgPr>
     </p:bg>
     <p:spTree>
@@ -7199,13 +7212,6 @@
             <a:prstDash val="solid"/>
           </a:ln>
         </p:spPr>
-        <p:txBody>
-          <a:bodyPr/>
-          <a:lstStyle/>
-          <a:p>
-            <a:endParaRPr lang="zh-CN" altLang="en-US"/>
-          </a:p>
-        </p:txBody>
       </p:sp>
       <p:sp>
         <p:nvSpPr>
@@ -7228,7 +7234,7 @@
           <a:bodyPr wrap="square" lIns="0" tIns="0" rIns="0" bIns="0" rtlCol="0" anchor="ctr"/>
           <a:lstStyle/>
           <a:p>
-            <a:pPr marL="0" indent="0">
+            <a:pPr indent="0" marL="0">
               <a:buNone/>
             </a:pPr>
             <a:r>
@@ -7267,7 +7273,7 @@
           <a:bodyPr wrap="square" lIns="0" tIns="0" rIns="0" bIns="0" rtlCol="0" anchor="ctr"/>
           <a:lstStyle/>
           <a:p>
-            <a:pPr marL="0" indent="0" algn="r">
+            <a:pPr algn="r" indent="0" marL="0">
               <a:buNone/>
             </a:pPr>
             <a:r>
@@ -7306,7 +7312,7 @@
           <a:bodyPr wrap="square" lIns="0" tIns="0" rIns="0" bIns="0" rtlCol="0" anchor="ctr"/>
           <a:lstStyle/>
           <a:p>
-            <a:pPr marL="0" indent="0">
+            <a:pPr indent="0" marL="0">
               <a:buNone/>
             </a:pPr>
             <a:r>
@@ -7345,7 +7351,7 @@
           <a:bodyPr wrap="square" lIns="0" tIns="0" rIns="0" bIns="0" rtlCol="0" anchor="ctr"/>
           <a:lstStyle/>
           <a:p>
-            <a:pPr marL="0" indent="0" algn="r">
+            <a:pPr algn="r" indent="0" marL="0">
               <a:buNone/>
             </a:pPr>
             <a:r>
@@ -7389,13 +7395,6 @@
             <a:prstDash val="solid"/>
           </a:ln>
         </p:spPr>
-        <p:txBody>
-          <a:bodyPr/>
-          <a:lstStyle/>
-          <a:p>
-            <a:endParaRPr lang="zh-CN" altLang="en-US"/>
-          </a:p>
-        </p:txBody>
       </p:sp>
       <p:sp>
         <p:nvSpPr>
@@ -7418,7 +7417,7 @@
           <a:bodyPr wrap="square" lIns="0" tIns="0" rIns="0" bIns="0" rtlCol="0" anchor="ctr"/>
           <a:lstStyle/>
           <a:p>
-            <a:pPr marL="0" indent="0">
+            <a:pPr indent="0" marL="0">
               <a:buNone/>
             </a:pPr>
             <a:r>
@@ -7459,7 +7458,7 @@
           </a:bodyPr>
           <a:lstStyle/>
           <a:p>
-            <a:pPr marL="0" indent="0">
+            <a:pPr indent="0" marL="0">
               <a:buNone/>
             </a:pPr>
             <a:r>
@@ -7503,13 +7502,6 @@
             <a:prstDash val="solid"/>
           </a:ln>
         </p:spPr>
-        <p:txBody>
-          <a:bodyPr/>
-          <a:lstStyle/>
-          <a:p>
-            <a:endParaRPr lang="zh-CN" altLang="en-US"/>
-          </a:p>
-        </p:txBody>
       </p:sp>
       <p:sp>
         <p:nvSpPr>
@@ -7532,7 +7524,7 @@
           <a:bodyPr wrap="square" lIns="0" tIns="0" rIns="0" bIns="0" rtlCol="0" anchor="ctr"/>
           <a:lstStyle/>
           <a:p>
-            <a:pPr marL="0" indent="0">
+            <a:pPr indent="0" marL="0">
               <a:buNone/>
             </a:pPr>
             <a:r>
@@ -7573,7 +7565,7 @@
           </a:bodyPr>
           <a:lstStyle/>
           <a:p>
-            <a:pPr marL="0" indent="0">
+            <a:pPr indent="0" marL="0">
               <a:buNone/>
             </a:pPr>
             <a:r>
@@ -7617,13 +7609,6 @@
             <a:prstDash val="solid"/>
           </a:ln>
         </p:spPr>
-        <p:txBody>
-          <a:bodyPr/>
-          <a:lstStyle/>
-          <a:p>
-            <a:endParaRPr lang="zh-CN" altLang="en-US"/>
-          </a:p>
-        </p:txBody>
       </p:sp>
       <p:sp>
         <p:nvSpPr>
@@ -7646,7 +7631,7 @@
           <a:bodyPr wrap="square" lIns="0" tIns="0" rIns="0" bIns="0" rtlCol="0" anchor="ctr"/>
           <a:lstStyle/>
           <a:p>
-            <a:pPr marL="0" indent="0">
+            <a:pPr indent="0" marL="0">
               <a:buNone/>
             </a:pPr>
             <a:r>
@@ -7687,7 +7672,7 @@
           </a:bodyPr>
           <a:lstStyle/>
           <a:p>
-            <a:pPr marL="0" indent="0">
+            <a:pPr indent="0" marL="0">
               <a:buNone/>
             </a:pPr>
             <a:r>
@@ -7731,13 +7716,6 @@
             <a:prstDash val="solid"/>
           </a:ln>
         </p:spPr>
-        <p:txBody>
-          <a:bodyPr/>
-          <a:lstStyle/>
-          <a:p>
-            <a:endParaRPr lang="zh-CN" altLang="en-US"/>
-          </a:p>
-        </p:txBody>
       </p:sp>
       <p:sp>
         <p:nvSpPr>
@@ -7760,7 +7738,7 @@
           <a:bodyPr wrap="square" lIns="0" tIns="0" rIns="0" bIns="0" rtlCol="0" anchor="ctr"/>
           <a:lstStyle/>
           <a:p>
-            <a:pPr marL="0" indent="0">
+            <a:pPr indent="0" marL="0">
               <a:buNone/>
             </a:pPr>
             <a:r>
@@ -7801,7 +7779,7 @@
           </a:bodyPr>
           <a:lstStyle/>
           <a:p>
-            <a:pPr marL="0" indent="0">
+            <a:pPr indent="0" marL="0">
               <a:buNone/>
             </a:pPr>
             <a:r>
@@ -7845,13 +7823,6 @@
             <a:prstDash val="solid"/>
           </a:ln>
         </p:spPr>
-        <p:txBody>
-          <a:bodyPr/>
-          <a:lstStyle/>
-          <a:p>
-            <a:endParaRPr lang="zh-CN" altLang="en-US"/>
-          </a:p>
-        </p:txBody>
       </p:sp>
       <p:sp>
         <p:nvSpPr>
@@ -7874,7 +7845,7 @@
           <a:bodyPr wrap="square" lIns="0" tIns="0" rIns="0" bIns="0" rtlCol="0" anchor="ctr"/>
           <a:lstStyle/>
           <a:p>
-            <a:pPr marL="0" indent="0">
+            <a:pPr indent="0" marL="0">
               <a:buNone/>
             </a:pPr>
             <a:r>
@@ -7915,7 +7886,7 @@
           </a:bodyPr>
           <a:lstStyle/>
           <a:p>
-            <a:pPr marL="0" indent="0">
+            <a:pPr indent="0" marL="0">
               <a:buNone/>
             </a:pPr>
             <a:r>
@@ -7949,7 +7920,6 @@
         <a:solidFill>
           <a:srgbClr val="F7F5F1"/>
         </a:solidFill>
-        <a:effectLst/>
       </p:bgPr>
     </p:bg>
     <p:spTree>
@@ -7992,13 +7962,6 @@
             <a:prstDash val="solid"/>
           </a:ln>
         </p:spPr>
-        <p:txBody>
-          <a:bodyPr/>
-          <a:lstStyle/>
-          <a:p>
-            <a:endParaRPr lang="zh-CN" altLang="en-US"/>
-          </a:p>
-        </p:txBody>
       </p:sp>
       <p:sp>
         <p:nvSpPr>
@@ -8021,7 +7984,7 @@
           <a:bodyPr wrap="square" lIns="0" tIns="0" rIns="0" bIns="0" rtlCol="0" anchor="ctr"/>
           <a:lstStyle/>
           <a:p>
-            <a:pPr marL="0" indent="0">
+            <a:pPr indent="0" marL="0">
               <a:buNone/>
             </a:pPr>
             <a:r>
@@ -8060,7 +8023,7 @@
           <a:bodyPr wrap="square" lIns="0" tIns="0" rIns="0" bIns="0" rtlCol="0" anchor="ctr"/>
           <a:lstStyle/>
           <a:p>
-            <a:pPr marL="0" indent="0" algn="r">
+            <a:pPr algn="r" indent="0" marL="0">
               <a:buNone/>
             </a:pPr>
             <a:r>
@@ -8099,7 +8062,7 @@
           <a:bodyPr wrap="square" lIns="0" tIns="0" rIns="0" bIns="0" rtlCol="0" anchor="ctr"/>
           <a:lstStyle/>
           <a:p>
-            <a:pPr marL="0" indent="0">
+            <a:pPr indent="0" marL="0">
               <a:buNone/>
             </a:pPr>
             <a:r>
@@ -8138,7 +8101,7 @@
           <a:bodyPr wrap="square" lIns="0" tIns="0" rIns="0" bIns="0" rtlCol="0" anchor="ctr"/>
           <a:lstStyle/>
           <a:p>
-            <a:pPr marL="0" indent="0" algn="r">
+            <a:pPr algn="r" indent="0" marL="0">
               <a:buNone/>
             </a:pPr>
             <a:r>
@@ -8177,7 +8140,7 @@
           <a:bodyPr wrap="square" lIns="0" tIns="0" rIns="0" bIns="0" rtlCol="0" anchor="ctr"/>
           <a:lstStyle/>
           <a:p>
-            <a:pPr marL="0" indent="0">
+            <a:pPr indent="0" marL="0">
               <a:buNone/>
             </a:pPr>
             <a:r>
@@ -8221,13 +8184,6 @@
             <a:prstDash val="solid"/>
           </a:ln>
         </p:spPr>
-        <p:txBody>
-          <a:bodyPr/>
-          <a:lstStyle/>
-          <a:p>
-            <a:endParaRPr lang="zh-CN" altLang="en-US"/>
-          </a:p>
-        </p:txBody>
       </p:sp>
       <p:sp>
         <p:nvSpPr>
@@ -8250,7 +8206,7 @@
           <a:bodyPr wrap="square" lIns="0" tIns="0" rIns="0" bIns="0" rtlCol="0" anchor="ctr"/>
           <a:lstStyle/>
           <a:p>
-            <a:pPr marL="0" indent="0">
+            <a:pPr indent="0" marL="0">
               <a:buNone/>
             </a:pPr>
             <a:r>
@@ -8291,7 +8247,7 @@
           </a:bodyPr>
           <a:lstStyle/>
           <a:p>
-            <a:pPr marL="0" indent="0">
+            <a:pPr indent="0" marL="0">
               <a:buNone/>
             </a:pPr>
             <a:r>
@@ -8335,13 +8291,6 @@
             <a:prstDash val="solid"/>
           </a:ln>
         </p:spPr>
-        <p:txBody>
-          <a:bodyPr/>
-          <a:lstStyle/>
-          <a:p>
-            <a:endParaRPr lang="zh-CN" altLang="en-US"/>
-          </a:p>
-        </p:txBody>
       </p:sp>
       <p:sp>
         <p:nvSpPr>
@@ -8364,7 +8313,7 @@
           <a:bodyPr wrap="square" lIns="0" tIns="0" rIns="0" bIns="0" rtlCol="0" anchor="ctr"/>
           <a:lstStyle/>
           <a:p>
-            <a:pPr marL="0" indent="0">
+            <a:pPr indent="0" marL="0">
               <a:buNone/>
             </a:pPr>
             <a:r>
@@ -8405,7 +8354,7 @@
           </a:bodyPr>
           <a:lstStyle/>
           <a:p>
-            <a:pPr marL="0" indent="0">
+            <a:pPr indent="0" marL="0">
               <a:buNone/>
             </a:pPr>
             <a:r>
@@ -8449,13 +8398,6 @@
             <a:prstDash val="solid"/>
           </a:ln>
         </p:spPr>
-        <p:txBody>
-          <a:bodyPr/>
-          <a:lstStyle/>
-          <a:p>
-            <a:endParaRPr lang="zh-CN" altLang="en-US"/>
-          </a:p>
-        </p:txBody>
       </p:sp>
       <p:sp>
         <p:nvSpPr>
@@ -8478,7 +8420,7 @@
           <a:bodyPr wrap="square" lIns="0" tIns="0" rIns="0" bIns="0" rtlCol="0" anchor="ctr"/>
           <a:lstStyle/>
           <a:p>
-            <a:pPr marL="0" indent="0">
+            <a:pPr indent="0" marL="0">
               <a:buNone/>
             </a:pPr>
             <a:r>
@@ -8519,7 +8461,7 @@
           </a:bodyPr>
           <a:lstStyle/>
           <a:p>
-            <a:pPr marL="0" indent="0">
+            <a:pPr indent="0" marL="0">
               <a:buNone/>
             </a:pPr>
             <a:r>
@@ -8563,13 +8505,6 @@
             <a:prstDash val="solid"/>
           </a:ln>
         </p:spPr>
-        <p:txBody>
-          <a:bodyPr/>
-          <a:lstStyle/>
-          <a:p>
-            <a:endParaRPr lang="zh-CN" altLang="en-US"/>
-          </a:p>
-        </p:txBody>
       </p:sp>
       <p:sp>
         <p:nvSpPr>
@@ -8592,7 +8527,7 @@
           <a:bodyPr wrap="square" lIns="0" tIns="0" rIns="0" bIns="0" rtlCol="0" anchor="ctr"/>
           <a:lstStyle/>
           <a:p>
-            <a:pPr marL="0" indent="0">
+            <a:pPr indent="0" marL="0">
               <a:buNone/>
             </a:pPr>
             <a:r>
@@ -8633,7 +8568,7 @@
           </a:bodyPr>
           <a:lstStyle/>
           <a:p>
-            <a:pPr marL="0" indent="0">
+            <a:pPr indent="0" marL="0">
               <a:buNone/>
             </a:pPr>
             <a:r>
@@ -8650,13 +8585,13 @@
             <a:endParaRPr lang="en-US" sz="1220" dirty="0"/>
           </a:p>
           <a:p>
-            <a:pPr marL="0" indent="0">
+            <a:pPr indent="0" marL="0">
               <a:buNone/>
             </a:pPr>
             <a:endParaRPr lang="en-US" sz="1220" dirty="0"/>
           </a:p>
           <a:p>
-            <a:pPr marL="0" indent="0">
+            <a:pPr indent="0" marL="0">
               <a:buNone/>
             </a:pPr>
             <a:r>
@@ -8673,13 +8608,13 @@
             <a:endParaRPr lang="en-US" sz="1220" dirty="0"/>
           </a:p>
           <a:p>
-            <a:pPr marL="0" indent="0">
+            <a:pPr indent="0" marL="0">
               <a:buNone/>
             </a:pPr>
             <a:endParaRPr lang="en-US" sz="1220" dirty="0"/>
           </a:p>
           <a:p>
-            <a:pPr marL="0" indent="0">
+            <a:pPr indent="0" marL="0">
               <a:buNone/>
             </a:pPr>
             <a:r>
@@ -8725,13 +8660,6 @@
             <a:prstDash val="solid"/>
           </a:ln>
         </p:spPr>
-        <p:txBody>
-          <a:bodyPr/>
-          <a:lstStyle/>
-          <a:p>
-            <a:endParaRPr lang="zh-CN" altLang="en-US"/>
-          </a:p>
-        </p:txBody>
       </p:sp>
       <p:sp>
         <p:nvSpPr>
@@ -8754,7 +8682,7 @@
           <a:bodyPr wrap="square" lIns="0" tIns="0" rIns="0" bIns="0" rtlCol="0" anchor="ctr"/>
           <a:lstStyle/>
           <a:p>
-            <a:pPr marL="0" indent="0" algn="ctr">
+            <a:pPr algn="ctr" indent="0" marL="0">
               <a:buNone/>
             </a:pPr>
             <a:r>
@@ -8795,7 +8723,7 @@
           </a:bodyPr>
           <a:lstStyle/>
           <a:p>
-            <a:pPr marL="0" indent="0" algn="ctr">
+            <a:pPr algn="ctr" indent="0" marL="0">
               <a:buNone/>
             </a:pPr>
             <a:r>
@@ -8841,13 +8769,6 @@
             <a:prstDash val="solid"/>
           </a:ln>
         </p:spPr>
-        <p:txBody>
-          <a:bodyPr/>
-          <a:lstStyle/>
-          <a:p>
-            <a:endParaRPr lang="zh-CN" altLang="en-US"/>
-          </a:p>
-        </p:txBody>
       </p:sp>
       <p:sp>
         <p:nvSpPr>
@@ -8870,7 +8791,7 @@
           <a:bodyPr wrap="square" lIns="0" tIns="0" rIns="0" bIns="0" rtlCol="0" anchor="ctr"/>
           <a:lstStyle/>
           <a:p>
-            <a:pPr marL="0" indent="0" algn="ctr">
+            <a:pPr algn="ctr" indent="0" marL="0">
               <a:buNone/>
             </a:pPr>
             <a:r>
@@ -8911,7 +8832,7 @@
           </a:bodyPr>
           <a:lstStyle/>
           <a:p>
-            <a:pPr marL="0" indent="0" algn="ctr">
+            <a:pPr algn="ctr" indent="0" marL="0">
               <a:buNone/>
             </a:pPr>
             <a:r>
@@ -8957,13 +8878,6 @@
             <a:prstDash val="solid"/>
           </a:ln>
         </p:spPr>
-        <p:txBody>
-          <a:bodyPr/>
-          <a:lstStyle/>
-          <a:p>
-            <a:endParaRPr lang="zh-CN" altLang="en-US"/>
-          </a:p>
-        </p:txBody>
       </p:sp>
       <p:sp>
         <p:nvSpPr>
@@ -8986,7 +8900,7 @@
           <a:bodyPr wrap="square" lIns="0" tIns="0" rIns="0" bIns="0" rtlCol="0" anchor="ctr"/>
           <a:lstStyle/>
           <a:p>
-            <a:pPr marL="0" indent="0" algn="ctr">
+            <a:pPr algn="ctr" indent="0" marL="0">
               <a:buNone/>
             </a:pPr>
             <a:r>
@@ -9027,7 +8941,7 @@
           </a:bodyPr>
           <a:lstStyle/>
           <a:p>
-            <a:pPr marL="0" indent="0" algn="ctr">
+            <a:pPr algn="ctr" indent="0" marL="0">
               <a:buNone/>
             </a:pPr>
             <a:r>
@@ -9061,7 +8975,6 @@
         <a:solidFill>
           <a:srgbClr val="FFFFFF"/>
         </a:solidFill>
-        <a:effectLst/>
       </p:bgPr>
     </p:bg>
     <p:spTree>
@@ -9104,13 +9017,6 @@
             <a:prstDash val="solid"/>
           </a:ln>
         </p:spPr>
-        <p:txBody>
-          <a:bodyPr/>
-          <a:lstStyle/>
-          <a:p>
-            <a:endParaRPr lang="zh-CN" altLang="en-US"/>
-          </a:p>
-        </p:txBody>
       </p:sp>
       <p:sp>
         <p:nvSpPr>
@@ -9133,7 +9039,7 @@
           <a:bodyPr wrap="square" lIns="0" tIns="0" rIns="0" bIns="0" rtlCol="0" anchor="ctr"/>
           <a:lstStyle/>
           <a:p>
-            <a:pPr marL="0" indent="0">
+            <a:pPr indent="0" marL="0">
               <a:buNone/>
             </a:pPr>
             <a:r>
@@ -9172,7 +9078,7 @@
           <a:bodyPr wrap="square" lIns="0" tIns="0" rIns="0" bIns="0" rtlCol="0" anchor="ctr"/>
           <a:lstStyle/>
           <a:p>
-            <a:pPr marL="0" indent="0" algn="r">
+            <a:pPr algn="r" indent="0" marL="0">
               <a:buNone/>
             </a:pPr>
             <a:r>
@@ -9211,7 +9117,7 @@
           <a:bodyPr wrap="square" lIns="0" tIns="0" rIns="0" bIns="0" rtlCol="0" anchor="ctr"/>
           <a:lstStyle/>
           <a:p>
-            <a:pPr marL="0" indent="0">
+            <a:pPr indent="0" marL="0">
               <a:buNone/>
             </a:pPr>
             <a:r>
@@ -9250,7 +9156,7 @@
           <a:bodyPr wrap="square" lIns="0" tIns="0" rIns="0" bIns="0" rtlCol="0" anchor="ctr"/>
           <a:lstStyle/>
           <a:p>
-            <a:pPr marL="0" indent="0" algn="r">
+            <a:pPr algn="r" indent="0" marL="0">
               <a:buNone/>
             </a:pPr>
             <a:r>
@@ -9289,7 +9195,7 @@
           <a:bodyPr wrap="square" lIns="0" tIns="0" rIns="0" bIns="0" rtlCol="0" anchor="ctr"/>
           <a:lstStyle/>
           <a:p>
-            <a:pPr marL="0" indent="0">
+            <a:pPr indent="0" marL="0">
               <a:buNone/>
             </a:pPr>
             <a:r>
@@ -9333,13 +9239,6 @@
             <a:prstDash val="solid"/>
           </a:ln>
         </p:spPr>
-        <p:txBody>
-          <a:bodyPr/>
-          <a:lstStyle/>
-          <a:p>
-            <a:endParaRPr lang="zh-CN" altLang="en-US"/>
-          </a:p>
-        </p:txBody>
       </p:sp>
       <p:sp>
         <p:nvSpPr>
@@ -9367,13 +9266,6 @@
             <a:prstDash val="solid"/>
           </a:ln>
         </p:spPr>
-        <p:txBody>
-          <a:bodyPr/>
-          <a:lstStyle/>
-          <a:p>
-            <a:endParaRPr lang="zh-CN" altLang="en-US"/>
-          </a:p>
-        </p:txBody>
       </p:sp>
       <p:sp>
         <p:nvSpPr>
@@ -9396,7 +9288,7 @@
           <a:bodyPr wrap="square" lIns="0" tIns="0" rIns="0" bIns="0" rtlCol="0" anchor="ctr"/>
           <a:lstStyle/>
           <a:p>
-            <a:pPr marL="0" indent="0" algn="ctr">
+            <a:pPr algn="ctr" indent="0" marL="0">
               <a:buNone/>
             </a:pPr>
             <a:r>
@@ -9435,7 +9327,7 @@
           <a:bodyPr wrap="square" lIns="0" tIns="0" rIns="0" bIns="0" rtlCol="0" anchor="ctr"/>
           <a:lstStyle/>
           <a:p>
-            <a:pPr marL="0" indent="0">
+            <a:pPr indent="0" marL="0">
               <a:buNone/>
             </a:pPr>
             <a:r>
@@ -9476,7 +9368,7 @@
           </a:bodyPr>
           <a:lstStyle/>
           <a:p>
-            <a:pPr marL="0" indent="0">
+            <a:pPr indent="0" marL="0">
               <a:buNone/>
             </a:pPr>
             <a:r>
@@ -9520,13 +9412,6 @@
             <a:prstDash val="solid"/>
           </a:ln>
         </p:spPr>
-        <p:txBody>
-          <a:bodyPr/>
-          <a:lstStyle/>
-          <a:p>
-            <a:endParaRPr lang="zh-CN" altLang="en-US"/>
-          </a:p>
-        </p:txBody>
       </p:sp>
       <p:sp>
         <p:nvSpPr>
@@ -9554,13 +9439,6 @@
             <a:prstDash val="solid"/>
           </a:ln>
         </p:spPr>
-        <p:txBody>
-          <a:bodyPr/>
-          <a:lstStyle/>
-          <a:p>
-            <a:endParaRPr lang="zh-CN" altLang="en-US"/>
-          </a:p>
-        </p:txBody>
       </p:sp>
       <p:sp>
         <p:nvSpPr>
@@ -9583,7 +9461,7 @@
           <a:bodyPr wrap="square" lIns="0" tIns="0" rIns="0" bIns="0" rtlCol="0" anchor="ctr"/>
           <a:lstStyle/>
           <a:p>
-            <a:pPr marL="0" indent="0" algn="ctr">
+            <a:pPr algn="ctr" indent="0" marL="0">
               <a:buNone/>
             </a:pPr>
             <a:r>
@@ -9622,7 +9500,7 @@
           <a:bodyPr wrap="square" lIns="0" tIns="0" rIns="0" bIns="0" rtlCol="0" anchor="ctr"/>
           <a:lstStyle/>
           <a:p>
-            <a:pPr marL="0" indent="0">
+            <a:pPr indent="0" marL="0">
               <a:buNone/>
             </a:pPr>
             <a:r>
@@ -9663,7 +9541,7 @@
           </a:bodyPr>
           <a:lstStyle/>
           <a:p>
-            <a:pPr marL="0" indent="0">
+            <a:pPr indent="0" marL="0">
               <a:buNone/>
             </a:pPr>
             <a:r>
@@ -9707,13 +9585,6 @@
             <a:prstDash val="solid"/>
           </a:ln>
         </p:spPr>
-        <p:txBody>
-          <a:bodyPr/>
-          <a:lstStyle/>
-          <a:p>
-            <a:endParaRPr lang="zh-CN" altLang="en-US"/>
-          </a:p>
-        </p:txBody>
       </p:sp>
       <p:sp>
         <p:nvSpPr>
@@ -9741,13 +9612,6 @@
             <a:prstDash val="solid"/>
           </a:ln>
         </p:spPr>
-        <p:txBody>
-          <a:bodyPr/>
-          <a:lstStyle/>
-          <a:p>
-            <a:endParaRPr lang="zh-CN" altLang="en-US"/>
-          </a:p>
-        </p:txBody>
       </p:sp>
       <p:sp>
         <p:nvSpPr>
@@ -9770,7 +9634,7 @@
           <a:bodyPr wrap="square" lIns="0" tIns="0" rIns="0" bIns="0" rtlCol="0" anchor="ctr"/>
           <a:lstStyle/>
           <a:p>
-            <a:pPr marL="0" indent="0" algn="ctr">
+            <a:pPr algn="ctr" indent="0" marL="0">
               <a:buNone/>
             </a:pPr>
             <a:r>
@@ -9809,7 +9673,7 @@
           <a:bodyPr wrap="square" lIns="0" tIns="0" rIns="0" bIns="0" rtlCol="0" anchor="ctr"/>
           <a:lstStyle/>
           <a:p>
-            <a:pPr marL="0" indent="0">
+            <a:pPr indent="0" marL="0">
               <a:buNone/>
             </a:pPr>
             <a:r>
@@ -9850,7 +9714,7 @@
           </a:bodyPr>
           <a:lstStyle/>
           <a:p>
-            <a:pPr marL="0" indent="0">
+            <a:pPr indent="0" marL="0">
               <a:buNone/>
             </a:pPr>
             <a:r>
@@ -9894,13 +9758,6 @@
             <a:prstDash val="solid"/>
           </a:ln>
         </p:spPr>
-        <p:txBody>
-          <a:bodyPr/>
-          <a:lstStyle/>
-          <a:p>
-            <a:endParaRPr lang="zh-CN" altLang="en-US"/>
-          </a:p>
-        </p:txBody>
       </p:sp>
       <p:sp>
         <p:nvSpPr>
@@ -9928,13 +9785,6 @@
             <a:prstDash val="solid"/>
           </a:ln>
         </p:spPr>
-        <p:txBody>
-          <a:bodyPr/>
-          <a:lstStyle/>
-          <a:p>
-            <a:endParaRPr lang="zh-CN" altLang="en-US"/>
-          </a:p>
-        </p:txBody>
       </p:sp>
       <p:sp>
         <p:nvSpPr>
@@ -9957,7 +9807,7 @@
           <a:bodyPr wrap="square" lIns="0" tIns="0" rIns="0" bIns="0" rtlCol="0" anchor="ctr"/>
           <a:lstStyle/>
           <a:p>
-            <a:pPr marL="0" indent="0" algn="ctr">
+            <a:pPr algn="ctr" indent="0" marL="0">
               <a:buNone/>
             </a:pPr>
             <a:r>
@@ -9996,7 +9846,7 @@
           <a:bodyPr wrap="square" lIns="0" tIns="0" rIns="0" bIns="0" rtlCol="0" anchor="ctr"/>
           <a:lstStyle/>
           <a:p>
-            <a:pPr marL="0" indent="0">
+            <a:pPr indent="0" marL="0">
               <a:buNone/>
             </a:pPr>
             <a:r>
@@ -10037,7 +9887,7 @@
           </a:bodyPr>
           <a:lstStyle/>
           <a:p>
-            <a:pPr marL="0" indent="0">
+            <a:pPr indent="0" marL="0">
               <a:buNone/>
             </a:pPr>
             <a:r>
@@ -10081,13 +9931,6 @@
             <a:prstDash val="solid"/>
           </a:ln>
         </p:spPr>
-        <p:txBody>
-          <a:bodyPr/>
-          <a:lstStyle/>
-          <a:p>
-            <a:endParaRPr lang="zh-CN" altLang="en-US"/>
-          </a:p>
-        </p:txBody>
       </p:sp>
       <p:sp>
         <p:nvSpPr>
@@ -10110,7 +9953,7 @@
           <a:bodyPr wrap="square" lIns="0" tIns="0" rIns="0" bIns="0" rtlCol="0" anchor="ctr"/>
           <a:lstStyle/>
           <a:p>
-            <a:pPr marL="0" indent="0">
+            <a:pPr indent="0" marL="0">
               <a:buNone/>
             </a:pPr>
             <a:r>
@@ -10151,7 +9994,7 @@
           </a:bodyPr>
           <a:lstStyle/>
           <a:p>
-            <a:pPr marL="0" indent="0">
+            <a:pPr indent="0" marL="0">
               <a:buNone/>
             </a:pPr>
             <a:r>
@@ -10168,7 +10011,7 @@
             <a:endParaRPr lang="en-US" sz="1220" dirty="0"/>
           </a:p>
           <a:p>
-            <a:pPr marL="0" indent="0">
+            <a:pPr indent="0" marL="0">
               <a:buNone/>
             </a:pPr>
             <a:r>
@@ -10185,7 +10028,7 @@
             <a:endParaRPr lang="en-US" sz="1220" dirty="0"/>
           </a:p>
           <a:p>
-            <a:pPr marL="0" indent="0">
+            <a:pPr indent="0" marL="0">
               <a:buNone/>
             </a:pPr>
             <a:r>
@@ -10202,7 +10045,7 @@
             <a:endParaRPr lang="en-US" sz="1220" dirty="0"/>
           </a:p>
           <a:p>
-            <a:pPr marL="0" indent="0">
+            <a:pPr indent="0" marL="0">
               <a:buNone/>
             </a:pPr>
             <a:r>
@@ -10219,7 +10062,7 @@
             <a:endParaRPr lang="en-US" sz="1220" dirty="0"/>
           </a:p>
           <a:p>
-            <a:pPr marL="0" indent="0">
+            <a:pPr indent="0" marL="0">
               <a:buNone/>
             </a:pPr>
             <a:r>
@@ -10236,13 +10079,13 @@
             <a:endParaRPr lang="en-US" sz="1220" dirty="0"/>
           </a:p>
           <a:p>
-            <a:pPr marL="0" indent="0">
+            <a:pPr indent="0" marL="0">
               <a:buNone/>
             </a:pPr>
             <a:endParaRPr lang="en-US" sz="1220" dirty="0"/>
           </a:p>
           <a:p>
-            <a:pPr marL="0" indent="0">
+            <a:pPr indent="0" marL="0">
               <a:buNone/>
             </a:pPr>
             <a:r>
@@ -10276,7 +10119,6 @@
         <a:solidFill>
           <a:srgbClr val="F7F5F1"/>
         </a:solidFill>
-        <a:effectLst/>
       </p:bgPr>
     </p:bg>
     <p:spTree>
@@ -10319,13 +10161,6 @@
             <a:prstDash val="solid"/>
           </a:ln>
         </p:spPr>
-        <p:txBody>
-          <a:bodyPr/>
-          <a:lstStyle/>
-          <a:p>
-            <a:endParaRPr lang="zh-CN" altLang="en-US"/>
-          </a:p>
-        </p:txBody>
       </p:sp>
       <p:sp>
         <p:nvSpPr>
@@ -10348,7 +10183,7 @@
           <a:bodyPr wrap="square" lIns="0" tIns="0" rIns="0" bIns="0" rtlCol="0" anchor="ctr"/>
           <a:lstStyle/>
           <a:p>
-            <a:pPr marL="0" indent="0">
+            <a:pPr indent="0" marL="0">
               <a:buNone/>
             </a:pPr>
             <a:r>
@@ -10387,7 +10222,7 @@
           <a:bodyPr wrap="square" lIns="0" tIns="0" rIns="0" bIns="0" rtlCol="0" anchor="ctr"/>
           <a:lstStyle/>
           <a:p>
-            <a:pPr marL="0" indent="0" algn="r">
+            <a:pPr algn="r" indent="0" marL="0">
               <a:buNone/>
             </a:pPr>
             <a:r>
@@ -10426,7 +10261,7 @@
           <a:bodyPr wrap="square" lIns="0" tIns="0" rIns="0" bIns="0" rtlCol="0" anchor="ctr"/>
           <a:lstStyle/>
           <a:p>
-            <a:pPr marL="0" indent="0">
+            <a:pPr indent="0" marL="0">
               <a:buNone/>
             </a:pPr>
             <a:r>
@@ -10465,7 +10300,7 @@
           <a:bodyPr wrap="square" lIns="0" tIns="0" rIns="0" bIns="0" rtlCol="0" anchor="ctr"/>
           <a:lstStyle/>
           <a:p>
-            <a:pPr marL="0" indent="0" algn="r">
+            <a:pPr algn="r" indent="0" marL="0">
               <a:buNone/>
             </a:pPr>
             <a:r>
@@ -10504,7 +10339,7 @@
           <a:bodyPr wrap="square" lIns="0" tIns="0" rIns="0" bIns="0" rtlCol="0" anchor="ctr"/>
           <a:lstStyle/>
           <a:p>
-            <a:pPr marL="0" indent="0">
+            <a:pPr indent="0" marL="0">
               <a:buNone/>
             </a:pPr>
             <a:r>
@@ -10548,13 +10383,6 @@
             <a:prstDash val="solid"/>
           </a:ln>
         </p:spPr>
-        <p:txBody>
-          <a:bodyPr/>
-          <a:lstStyle/>
-          <a:p>
-            <a:endParaRPr lang="zh-CN" altLang="en-US"/>
-          </a:p>
-        </p:txBody>
       </p:sp>
       <p:sp>
         <p:nvSpPr>
@@ -10577,7 +10405,7 @@
           <a:bodyPr wrap="square" lIns="0" tIns="0" rIns="0" bIns="0" rtlCol="0" anchor="ctr"/>
           <a:lstStyle/>
           <a:p>
-            <a:pPr marL="0" indent="0">
+            <a:pPr indent="0" marL="0">
               <a:buNone/>
             </a:pPr>
             <a:r>
@@ -10618,7 +10446,7 @@
           </a:bodyPr>
           <a:lstStyle/>
           <a:p>
-            <a:pPr marL="0" indent="0">
+            <a:pPr indent="0" marL="0">
               <a:buNone/>
             </a:pPr>
             <a:r>
@@ -10635,7 +10463,7 @@
             <a:endParaRPr lang="en-US" sz="1220" dirty="0"/>
           </a:p>
           <a:p>
-            <a:pPr marL="0" indent="0">
+            <a:pPr indent="0" marL="0">
               <a:buNone/>
             </a:pPr>
             <a:r>
@@ -10652,13 +10480,13 @@
             <a:endParaRPr lang="en-US" sz="1220" dirty="0"/>
           </a:p>
           <a:p>
-            <a:pPr marL="0" indent="0">
+            <a:pPr indent="0" marL="0">
               <a:buNone/>
             </a:pPr>
             <a:endParaRPr lang="en-US" sz="1220" dirty="0"/>
           </a:p>
           <a:p>
-            <a:pPr marL="0" indent="0">
+            <a:pPr indent="0" marL="0">
               <a:buNone/>
             </a:pPr>
             <a:r>
@@ -10702,13 +10530,6 @@
             <a:prstDash val="solid"/>
           </a:ln>
         </p:spPr>
-        <p:txBody>
-          <a:bodyPr/>
-          <a:lstStyle/>
-          <a:p>
-            <a:endParaRPr lang="zh-CN" altLang="en-US"/>
-          </a:p>
-        </p:txBody>
       </p:sp>
       <p:sp>
         <p:nvSpPr>
@@ -10731,7 +10552,7 @@
           <a:bodyPr wrap="square" lIns="0" tIns="0" rIns="0" bIns="0" rtlCol="0" anchor="ctr"/>
           <a:lstStyle/>
           <a:p>
-            <a:pPr marL="0" indent="0">
+            <a:pPr indent="0" marL="0">
               <a:buNone/>
             </a:pPr>
             <a:r>
@@ -10772,7 +10593,7 @@
           </a:bodyPr>
           <a:lstStyle/>
           <a:p>
-            <a:pPr marL="0" indent="0">
+            <a:pPr indent="0" marL="0">
               <a:buNone/>
             </a:pPr>
             <a:r>
@@ -10789,7 +10610,7 @@
             <a:endParaRPr lang="en-US" sz="1220" dirty="0"/>
           </a:p>
           <a:p>
-            <a:pPr marL="0" indent="0">
+            <a:pPr indent="0" marL="0">
               <a:buNone/>
             </a:pPr>
             <a:r>
@@ -10806,13 +10627,13 @@
             <a:endParaRPr lang="en-US" sz="1220" dirty="0"/>
           </a:p>
           <a:p>
-            <a:pPr marL="0" indent="0">
+            <a:pPr indent="0" marL="0">
               <a:buNone/>
             </a:pPr>
             <a:endParaRPr lang="en-US" sz="1220" dirty="0"/>
           </a:p>
           <a:p>
-            <a:pPr marL="0" indent="0">
+            <a:pPr indent="0" marL="0">
               <a:buNone/>
             </a:pPr>
             <a:r>
@@ -10856,13 +10677,6 @@
             <a:prstDash val="solid"/>
           </a:ln>
         </p:spPr>
-        <p:txBody>
-          <a:bodyPr/>
-          <a:lstStyle/>
-          <a:p>
-            <a:endParaRPr lang="zh-CN" altLang="en-US"/>
-          </a:p>
-        </p:txBody>
       </p:sp>
       <p:sp>
         <p:nvSpPr>
@@ -10885,7 +10699,7 @@
           <a:bodyPr wrap="square" lIns="0" tIns="0" rIns="0" bIns="0" rtlCol="0" anchor="ctr"/>
           <a:lstStyle/>
           <a:p>
-            <a:pPr marL="0" indent="0">
+            <a:pPr indent="0" marL="0">
               <a:buNone/>
             </a:pPr>
             <a:r>
@@ -10926,7 +10740,7 @@
           </a:bodyPr>
           <a:lstStyle/>
           <a:p>
-            <a:pPr marL="0" indent="0">
+            <a:pPr indent="0" marL="0">
               <a:buNone/>
             </a:pPr>
             <a:r>
@@ -10943,13 +10757,13 @@
             <a:endParaRPr lang="en-US" sz="1220" dirty="0"/>
           </a:p>
           <a:p>
-            <a:pPr marL="0" indent="0">
+            <a:pPr indent="0" marL="0">
               <a:buNone/>
             </a:pPr>
             <a:endParaRPr lang="en-US" sz="1220" dirty="0"/>
           </a:p>
           <a:p>
-            <a:pPr marL="0" indent="0">
+            <a:pPr indent="0" marL="0">
               <a:buNone/>
             </a:pPr>
             <a:r>
@@ -10993,13 +10807,6 @@
             <a:prstDash val="solid"/>
           </a:ln>
         </p:spPr>
-        <p:txBody>
-          <a:bodyPr/>
-          <a:lstStyle/>
-          <a:p>
-            <a:endParaRPr lang="zh-CN" altLang="en-US"/>
-          </a:p>
-        </p:txBody>
       </p:sp>
       <p:sp>
         <p:nvSpPr>
@@ -11022,7 +10829,7 @@
           <a:bodyPr wrap="square" lIns="0" tIns="0" rIns="0" bIns="0" rtlCol="0" anchor="ctr"/>
           <a:lstStyle/>
           <a:p>
-            <a:pPr marL="0" indent="0">
+            <a:pPr indent="0" marL="0">
               <a:buNone/>
             </a:pPr>
             <a:r>
@@ -11063,7 +10870,7 @@
           </a:bodyPr>
           <a:lstStyle/>
           <a:p>
-            <a:pPr marL="0" indent="0">
+            <a:pPr indent="0" marL="0">
               <a:buNone/>
             </a:pPr>
             <a:r>
@@ -11097,7 +10904,6 @@
         <a:solidFill>
           <a:srgbClr val="F7F5F1"/>
         </a:solidFill>
-        <a:effectLst/>
       </p:bgPr>
     </p:bg>
     <p:spTree>
@@ -11140,13 +10946,6 @@
             <a:prstDash val="solid"/>
           </a:ln>
         </p:spPr>
-        <p:txBody>
-          <a:bodyPr/>
-          <a:lstStyle/>
-          <a:p>
-            <a:endParaRPr lang="zh-CN" altLang="en-US"/>
-          </a:p>
-        </p:txBody>
       </p:sp>
       <p:sp>
         <p:nvSpPr>
@@ -11169,7 +10968,7 @@
           <a:bodyPr wrap="square" lIns="0" tIns="0" rIns="0" bIns="0" rtlCol="0" anchor="ctr"/>
           <a:lstStyle/>
           <a:p>
-            <a:pPr marL="0" indent="0">
+            <a:pPr indent="0" marL="0">
               <a:buNone/>
             </a:pPr>
             <a:r>
@@ -11208,7 +11007,7 @@
           <a:bodyPr wrap="square" lIns="0" tIns="0" rIns="0" bIns="0" rtlCol="0" anchor="ctr"/>
           <a:lstStyle/>
           <a:p>
-            <a:pPr marL="0" indent="0" algn="r">
+            <a:pPr algn="r" indent="0" marL="0">
               <a:buNone/>
             </a:pPr>
             <a:r>
@@ -11247,7 +11046,7 @@
           <a:bodyPr wrap="square" lIns="0" tIns="0" rIns="0" bIns="0" rtlCol="0" anchor="ctr"/>
           <a:lstStyle/>
           <a:p>
-            <a:pPr marL="0" indent="0">
+            <a:pPr indent="0" marL="0">
               <a:buNone/>
             </a:pPr>
             <a:r>
@@ -11286,7 +11085,7 @@
           <a:bodyPr wrap="square" lIns="0" tIns="0" rIns="0" bIns="0" rtlCol="0" anchor="ctr"/>
           <a:lstStyle/>
           <a:p>
-            <a:pPr marL="0" indent="0" algn="r">
+            <a:pPr algn="r" indent="0" marL="0">
               <a:buNone/>
             </a:pPr>
             <a:r>
@@ -11325,7 +11124,7 @@
           <a:bodyPr wrap="square" lIns="0" tIns="0" rIns="0" bIns="0" rtlCol="0" anchor="ctr"/>
           <a:lstStyle/>
           <a:p>
-            <a:pPr marL="0" indent="0">
+            <a:pPr indent="0" marL="0">
               <a:buNone/>
             </a:pPr>
             <a:r>
@@ -11352,11 +11151,11 @@
         <p:spPr>
           <a:xfrm>
             <a:off x="713232" y="1325880"/>
-            <a:ext cx="2542032" cy="2011680"/>
+            <a:ext cx="2542032" cy="2148840"/>
           </a:xfrm>
           <a:prstGeom prst="roundRect">
             <a:avLst>
-              <a:gd name="adj" fmla="val 2273"/>
+              <a:gd name="adj" fmla="val 2128"/>
             </a:avLst>
           </a:prstGeom>
           <a:solidFill>
@@ -11369,13 +11168,6 @@
             <a:prstDash val="solid"/>
           </a:ln>
         </p:spPr>
-        <p:txBody>
-          <a:bodyPr/>
-          <a:lstStyle/>
-          <a:p>
-            <a:endParaRPr lang="zh-CN" altLang="en-US"/>
-          </a:p>
-        </p:txBody>
       </p:sp>
       <p:sp>
         <p:nvSpPr>
@@ -11398,7 +11190,7 @@
           <a:bodyPr wrap="square" lIns="0" tIns="0" rIns="0" bIns="0" rtlCol="0" anchor="ctr"/>
           <a:lstStyle/>
           <a:p>
-            <a:pPr marL="0" indent="0">
+            <a:pPr indent="0" marL="0">
               <a:buNone/>
             </a:pPr>
             <a:r>
@@ -11425,7 +11217,7 @@
         <p:spPr>
           <a:xfrm>
             <a:off x="850392" y="1664208"/>
-            <a:ext cx="2267712" cy="1581912"/>
+            <a:ext cx="2267712" cy="1719072"/>
           </a:xfrm>
           <a:prstGeom prst="rect">
             <a:avLst/>
@@ -11439,7 +11231,7 @@
           </a:bodyPr>
           <a:lstStyle/>
           <a:p>
-            <a:pPr marL="0" indent="0">
+            <a:pPr indent="0" marL="0">
               <a:buNone/>
             </a:pPr>
             <a:r>
@@ -11456,13 +11248,13 @@
             <a:endParaRPr lang="en-US" sz="1220" dirty="0"/>
           </a:p>
           <a:p>
-            <a:pPr marL="0" indent="0">
+            <a:pPr indent="0" marL="0">
               <a:buNone/>
             </a:pPr>
             <a:endParaRPr lang="en-US" sz="1220" dirty="0"/>
           </a:p>
           <a:p>
-            <a:pPr marL="0" indent="0">
+            <a:pPr indent="0" marL="0">
               <a:buNone/>
             </a:pPr>
             <a:r>
@@ -11489,11 +11281,11 @@
         <p:spPr>
           <a:xfrm>
             <a:off x="3328416" y="1325880"/>
-            <a:ext cx="2542032" cy="2011680"/>
+            <a:ext cx="2542032" cy="2148840"/>
           </a:xfrm>
           <a:prstGeom prst="roundRect">
             <a:avLst>
-              <a:gd name="adj" fmla="val 2273"/>
+              <a:gd name="adj" fmla="val 2128"/>
             </a:avLst>
           </a:prstGeom>
           <a:solidFill>
@@ -11506,13 +11298,6 @@
             <a:prstDash val="solid"/>
           </a:ln>
         </p:spPr>
-        <p:txBody>
-          <a:bodyPr/>
-          <a:lstStyle/>
-          <a:p>
-            <a:endParaRPr lang="zh-CN" altLang="en-US"/>
-          </a:p>
-        </p:txBody>
       </p:sp>
       <p:sp>
         <p:nvSpPr>
@@ -11535,7 +11320,7 @@
           <a:bodyPr wrap="square" lIns="0" tIns="0" rIns="0" bIns="0" rtlCol="0" anchor="ctr"/>
           <a:lstStyle/>
           <a:p>
-            <a:pPr marL="0" indent="0">
+            <a:pPr indent="0" marL="0">
               <a:buNone/>
             </a:pPr>
             <a:r>
@@ -11562,7 +11347,7 @@
         <p:spPr>
           <a:xfrm>
             <a:off x="3465576" y="1664208"/>
-            <a:ext cx="2267712" cy="1581912"/>
+            <a:ext cx="2267712" cy="1719072"/>
           </a:xfrm>
           <a:prstGeom prst="rect">
             <a:avLst/>
@@ -11576,7 +11361,7 @@
           </a:bodyPr>
           <a:lstStyle/>
           <a:p>
-            <a:pPr marL="0" indent="0">
+            <a:pPr indent="0" marL="0">
               <a:buNone/>
             </a:pPr>
             <a:r>
@@ -11593,13 +11378,13 @@
             <a:endParaRPr lang="en-US" sz="1220" dirty="0"/>
           </a:p>
           <a:p>
-            <a:pPr marL="0" indent="0">
+            <a:pPr indent="0" marL="0">
               <a:buNone/>
             </a:pPr>
             <a:endParaRPr lang="en-US" sz="1220" dirty="0"/>
           </a:p>
           <a:p>
-            <a:pPr marL="0" indent="0">
+            <a:pPr indent="0" marL="0">
               <a:buNone/>
             </a:pPr>
             <a:r>
@@ -11626,11 +11411,11 @@
         <p:spPr>
           <a:xfrm>
             <a:off x="5943600" y="1325880"/>
-            <a:ext cx="2542032" cy="2011680"/>
+            <a:ext cx="2542032" cy="2148840"/>
           </a:xfrm>
           <a:prstGeom prst="roundRect">
             <a:avLst>
-              <a:gd name="adj" fmla="val 2273"/>
+              <a:gd name="adj" fmla="val 2128"/>
             </a:avLst>
           </a:prstGeom>
           <a:solidFill>
@@ -11643,13 +11428,6 @@
             <a:prstDash val="solid"/>
           </a:ln>
         </p:spPr>
-        <p:txBody>
-          <a:bodyPr/>
-          <a:lstStyle/>
-          <a:p>
-            <a:endParaRPr lang="zh-CN" altLang="en-US"/>
-          </a:p>
-        </p:txBody>
       </p:sp>
       <p:sp>
         <p:nvSpPr>
@@ -11672,7 +11450,7 @@
           <a:bodyPr wrap="square" lIns="0" tIns="0" rIns="0" bIns="0" rtlCol="0" anchor="ctr"/>
           <a:lstStyle/>
           <a:p>
-            <a:pPr marL="0" indent="0">
+            <a:pPr indent="0" marL="0">
               <a:buNone/>
             </a:pPr>
             <a:r>
@@ -11699,7 +11477,7 @@
         <p:spPr>
           <a:xfrm>
             <a:off x="6080760" y="1664208"/>
-            <a:ext cx="2267712" cy="1581912"/>
+            <a:ext cx="2267712" cy="1719072"/>
           </a:xfrm>
           <a:prstGeom prst="rect">
             <a:avLst/>
@@ -11713,7 +11491,7 @@
           </a:bodyPr>
           <a:lstStyle/>
           <a:p>
-            <a:pPr marL="0" indent="0">
+            <a:pPr indent="0" marL="0">
               <a:buNone/>
             </a:pPr>
             <a:r>
@@ -11730,7 +11508,7 @@
             <a:endParaRPr lang="en-US" sz="1220" dirty="0"/>
           </a:p>
           <a:p>
-            <a:pPr marL="0" indent="0">
+            <a:pPr indent="0" marL="0">
               <a:buNone/>
             </a:pPr>
             <a:r>
@@ -11747,13 +11525,13 @@
             <a:endParaRPr lang="en-US" sz="1220" dirty="0"/>
           </a:p>
           <a:p>
-            <a:pPr marL="0" indent="0">
+            <a:pPr indent="0" marL="0">
               <a:buNone/>
             </a:pPr>
             <a:endParaRPr lang="en-US" sz="1220" dirty="0"/>
           </a:p>
           <a:p>
-            <a:pPr marL="0" indent="0">
+            <a:pPr indent="0" marL="0">
               <a:buNone/>
             </a:pPr>
             <a:r>
@@ -11779,12 +11557,12 @@
         </p:nvSpPr>
         <p:spPr>
           <a:xfrm>
-            <a:off x="987552" y="3785616"/>
-            <a:ext cx="7095744" cy="768096"/>
+            <a:off x="987552" y="3611880"/>
+            <a:ext cx="7095744" cy="914400"/>
           </a:xfrm>
           <a:prstGeom prst="roundRect">
             <a:avLst>
-              <a:gd name="adj" fmla="val 5952"/>
+              <a:gd name="adj" fmla="val 5000"/>
             </a:avLst>
           </a:prstGeom>
           <a:solidFill>
@@ -11797,13 +11575,6 @@
             <a:prstDash val="solid"/>
           </a:ln>
         </p:spPr>
-        <p:txBody>
-          <a:bodyPr/>
-          <a:lstStyle/>
-          <a:p>
-            <a:endParaRPr lang="zh-CN" altLang="en-US"/>
-          </a:p>
-        </p:txBody>
       </p:sp>
       <p:sp>
         <p:nvSpPr>
@@ -11813,7 +11584,7 @@
         </p:nvSpPr>
         <p:spPr>
           <a:xfrm>
-            <a:off x="1124712" y="3877056"/>
+            <a:off x="1124712" y="3703320"/>
             <a:ext cx="6821424" cy="182880"/>
           </a:xfrm>
           <a:prstGeom prst="rect">
@@ -11826,7 +11597,7 @@
           <a:bodyPr wrap="square" lIns="0" tIns="0" rIns="0" bIns="0" rtlCol="0" anchor="ctr"/>
           <a:lstStyle/>
           <a:p>
-            <a:pPr marL="0" indent="0">
+            <a:pPr indent="0" marL="0">
               <a:buNone/>
             </a:pPr>
             <a:r>
@@ -11852,8 +11623,8 @@
         </p:nvSpPr>
         <p:spPr>
           <a:xfrm>
-            <a:off x="1124712" y="4123944"/>
-            <a:ext cx="6821424" cy="338328"/>
+            <a:off x="1124712" y="3950208"/>
+            <a:ext cx="6821424" cy="484632"/>
           </a:xfrm>
           <a:prstGeom prst="rect">
             <a:avLst/>
@@ -11867,7 +11638,7 @@
           </a:bodyPr>
           <a:lstStyle/>
           <a:p>
-            <a:pPr marL="0" indent="0">
+            <a:pPr indent="0" marL="0">
               <a:buNone/>
             </a:pPr>
             <a:r>
@@ -11901,7 +11672,6 @@
         <a:solidFill>
           <a:srgbClr val="FFFFFF"/>
         </a:solidFill>
-        <a:effectLst/>
       </p:bgPr>
     </p:bg>
     <p:spTree>
@@ -11944,13 +11714,6 @@
             <a:prstDash val="solid"/>
           </a:ln>
         </p:spPr>
-        <p:txBody>
-          <a:bodyPr/>
-          <a:lstStyle/>
-          <a:p>
-            <a:endParaRPr lang="zh-CN" altLang="en-US"/>
-          </a:p>
-        </p:txBody>
       </p:sp>
       <p:sp>
         <p:nvSpPr>
@@ -11973,7 +11736,7 @@
           <a:bodyPr wrap="square" lIns="0" tIns="0" rIns="0" bIns="0" rtlCol="0" anchor="ctr"/>
           <a:lstStyle/>
           <a:p>
-            <a:pPr marL="0" indent="0">
+            <a:pPr indent="0" marL="0">
               <a:buNone/>
             </a:pPr>
             <a:r>
@@ -12012,7 +11775,7 @@
           <a:bodyPr wrap="square" lIns="0" tIns="0" rIns="0" bIns="0" rtlCol="0" anchor="ctr"/>
           <a:lstStyle/>
           <a:p>
-            <a:pPr marL="0" indent="0" algn="r">
+            <a:pPr algn="r" indent="0" marL="0">
               <a:buNone/>
             </a:pPr>
             <a:r>
@@ -12051,7 +11814,7 @@
           <a:bodyPr wrap="square" lIns="0" tIns="0" rIns="0" bIns="0" rtlCol="0" anchor="ctr"/>
           <a:lstStyle/>
           <a:p>
-            <a:pPr marL="0" indent="0">
+            <a:pPr indent="0" marL="0">
               <a:buNone/>
             </a:pPr>
             <a:r>
@@ -12090,7 +11853,7 @@
           <a:bodyPr wrap="square" lIns="0" tIns="0" rIns="0" bIns="0" rtlCol="0" anchor="ctr"/>
           <a:lstStyle/>
           <a:p>
-            <a:pPr marL="0" indent="0" algn="r">
+            <a:pPr algn="r" indent="0" marL="0">
               <a:buNone/>
             </a:pPr>
             <a:r>
@@ -12110,14 +11873,14 @@
       </p:sp>
       <p:pic>
         <p:nvPicPr>
-          <p:cNvPr id="7" name="Image 0" descr="H:\project\OpenGU\GULib-master\report\0417_5003report\figures\paper_figures\FIG-1_Generalization.png"/>
+          <p:cNvPr id="7" name="Image 0" descr="H:\project\OpenGU\GULib-master\report\0417_5003report\figures\paper_figures\FIG-1_Generalization.png">    </p:cNvPr>
           <p:cNvPicPr>
             <a:picLocks noChangeAspect="1"/>
           </p:cNvPicPr>
           <p:nvPr/>
         </p:nvPicPr>
         <p:blipFill>
-          <a:blip r:embed="rId3"/>
+          <a:blip r:embed="rId1"/>
           <a:stretch>
             <a:fillRect/>
           </a:stretch>
@@ -12153,7 +11916,7 @@
           <a:bodyPr wrap="square" lIns="0" tIns="0" rIns="0" bIns="0" rtlCol="0" anchor="ctr"/>
           <a:lstStyle/>
           <a:p>
-            <a:pPr marL="0" indent="0">
+            <a:pPr indent="0" marL="0">
               <a:buNone/>
             </a:pPr>
             <a:r>
@@ -12179,7 +11942,7 @@
         </p:nvSpPr>
         <p:spPr>
           <a:xfrm>
-            <a:off x="5650992" y="932688"/>
+            <a:off x="5650992" y="914400"/>
             <a:ext cx="2788920" cy="914400"/>
           </a:xfrm>
           <a:prstGeom prst="roundRect">
@@ -12197,13 +11960,6 @@
             <a:prstDash val="solid"/>
           </a:ln>
         </p:spPr>
-        <p:txBody>
-          <a:bodyPr/>
-          <a:lstStyle/>
-          <a:p>
-            <a:endParaRPr lang="zh-CN" altLang="en-US"/>
-          </a:p>
-        </p:txBody>
       </p:sp>
       <p:sp>
         <p:nvSpPr>
@@ -12213,7 +11969,7 @@
         </p:nvSpPr>
         <p:spPr>
           <a:xfrm>
-            <a:off x="5788152" y="1024128"/>
+            <a:off x="5788152" y="1005840"/>
             <a:ext cx="2514600" cy="182880"/>
           </a:xfrm>
           <a:prstGeom prst="rect">
@@ -12226,7 +11982,7 @@
           <a:bodyPr wrap="square" lIns="0" tIns="0" rIns="0" bIns="0" rtlCol="0" anchor="ctr"/>
           <a:lstStyle/>
           <a:p>
-            <a:pPr marL="0" indent="0">
+            <a:pPr indent="0" marL="0">
               <a:buNone/>
             </a:pPr>
             <a:r>
@@ -12252,7 +12008,7 @@
         </p:nvSpPr>
         <p:spPr>
           <a:xfrm>
-            <a:off x="5788152" y="1271016"/>
+            <a:off x="5788152" y="1252728"/>
             <a:ext cx="2514600" cy="484632"/>
           </a:xfrm>
           <a:prstGeom prst="rect">
@@ -12267,7 +12023,7 @@
           </a:bodyPr>
           <a:lstStyle/>
           <a:p>
-            <a:pPr marL="0" indent="0">
+            <a:pPr indent="0" marL="0">
               <a:buNone/>
             </a:pPr>
             <a:r>
@@ -12293,12 +12049,12 @@
         </p:nvSpPr>
         <p:spPr>
           <a:xfrm>
-            <a:off x="5650992" y="1993392"/>
-            <a:ext cx="2788920" cy="987552"/>
+            <a:off x="5650992" y="1965960"/>
+            <a:ext cx="2788920" cy="960120"/>
           </a:xfrm>
           <a:prstGeom prst="roundRect">
             <a:avLst>
-              <a:gd name="adj" fmla="val 4630"/>
+              <a:gd name="adj" fmla="val 4762"/>
             </a:avLst>
           </a:prstGeom>
           <a:solidFill>
@@ -12311,13 +12067,6 @@
             <a:prstDash val="solid"/>
           </a:ln>
         </p:spPr>
-        <p:txBody>
-          <a:bodyPr/>
-          <a:lstStyle/>
-          <a:p>
-            <a:endParaRPr lang="zh-CN" altLang="en-US"/>
-          </a:p>
-        </p:txBody>
       </p:sp>
       <p:sp>
         <p:nvSpPr>
@@ -12327,7 +12076,7 @@
         </p:nvSpPr>
         <p:spPr>
           <a:xfrm>
-            <a:off x="5788152" y="2084832"/>
+            <a:off x="5788152" y="2057400"/>
             <a:ext cx="2514600" cy="182880"/>
           </a:xfrm>
           <a:prstGeom prst="rect">
@@ -12340,7 +12089,7 @@
           <a:bodyPr wrap="square" lIns="0" tIns="0" rIns="0" bIns="0" rtlCol="0" anchor="ctr"/>
           <a:lstStyle/>
           <a:p>
-            <a:pPr marL="0" indent="0">
+            <a:pPr indent="0" marL="0">
               <a:buNone/>
             </a:pPr>
             <a:r>
@@ -12366,8 +12115,8 @@
         </p:nvSpPr>
         <p:spPr>
           <a:xfrm>
-            <a:off x="5788152" y="2331720"/>
-            <a:ext cx="2514600" cy="557784"/>
+            <a:off x="5788152" y="2304288"/>
+            <a:ext cx="2514600" cy="530352"/>
           </a:xfrm>
           <a:prstGeom prst="rect">
             <a:avLst/>
@@ -12381,7 +12130,7 @@
           </a:bodyPr>
           <a:lstStyle/>
           <a:p>
-            <a:pPr marL="0" indent="0">
+            <a:pPr indent="0" marL="0">
               <a:buNone/>
             </a:pPr>
             <a:r>
@@ -12398,7 +12147,7 @@
             <a:endParaRPr lang="en-US" sz="1220" dirty="0"/>
           </a:p>
           <a:p>
-            <a:pPr marL="0" indent="0">
+            <a:pPr indent="0" marL="0">
               <a:buNone/>
             </a:pPr>
             <a:r>
@@ -12415,7 +12164,7 @@
             <a:endParaRPr lang="en-US" sz="1220" dirty="0"/>
           </a:p>
           <a:p>
-            <a:pPr marL="0" indent="0">
+            <a:pPr indent="0" marL="0">
               <a:buNone/>
             </a:pPr>
             <a:r>
@@ -12441,12 +12190,12 @@
         </p:nvSpPr>
         <p:spPr>
           <a:xfrm>
-            <a:off x="5650992" y="3163824"/>
-            <a:ext cx="2788920" cy="1078992"/>
+            <a:off x="5650992" y="3063240"/>
+            <a:ext cx="2788920" cy="1280160"/>
           </a:xfrm>
           <a:prstGeom prst="roundRect">
             <a:avLst>
-              <a:gd name="adj" fmla="val 4237"/>
+              <a:gd name="adj" fmla="val 3571"/>
             </a:avLst>
           </a:prstGeom>
           <a:solidFill>
@@ -12459,13 +12208,6 @@
             <a:prstDash val="solid"/>
           </a:ln>
         </p:spPr>
-        <p:txBody>
-          <a:bodyPr/>
-          <a:lstStyle/>
-          <a:p>
-            <a:endParaRPr lang="zh-CN" altLang="en-US"/>
-          </a:p>
-        </p:txBody>
       </p:sp>
       <p:sp>
         <p:nvSpPr>
@@ -12475,7 +12217,7 @@
         </p:nvSpPr>
         <p:spPr>
           <a:xfrm>
-            <a:off x="5788152" y="3255264"/>
+            <a:off x="5788152" y="3154680"/>
             <a:ext cx="2514600" cy="182880"/>
           </a:xfrm>
           <a:prstGeom prst="rect">
@@ -12488,7 +12230,7 @@
           <a:bodyPr wrap="square" lIns="0" tIns="0" rIns="0" bIns="0" rtlCol="0" anchor="ctr"/>
           <a:lstStyle/>
           <a:p>
-            <a:pPr marL="0" indent="0">
+            <a:pPr indent="0" marL="0">
               <a:buNone/>
             </a:pPr>
             <a:r>
@@ -12514,8 +12256,8 @@
         </p:nvSpPr>
         <p:spPr>
           <a:xfrm>
-            <a:off x="5788152" y="3502152"/>
-            <a:ext cx="2514600" cy="649224"/>
+            <a:off x="5788152" y="3401568"/>
+            <a:ext cx="2514600" cy="850392"/>
           </a:xfrm>
           <a:prstGeom prst="rect">
             <a:avLst/>
@@ -12529,7 +12271,7 @@
           </a:bodyPr>
           <a:lstStyle/>
           <a:p>
-            <a:pPr marL="0" indent="0">
+            <a:pPr indent="0" marL="0">
               <a:buNone/>
             </a:pPr>
             <a:r>
@@ -12563,7 +12305,6 @@
         <a:solidFill>
           <a:srgbClr val="FFFFFF"/>
         </a:solidFill>
-        <a:effectLst/>
       </p:bgPr>
     </p:bg>
     <p:spTree>
@@ -12606,13 +12347,6 @@
             <a:prstDash val="solid"/>
           </a:ln>
         </p:spPr>
-        <p:txBody>
-          <a:bodyPr/>
-          <a:lstStyle/>
-          <a:p>
-            <a:endParaRPr lang="zh-CN" altLang="en-US"/>
-          </a:p>
-        </p:txBody>
       </p:sp>
       <p:sp>
         <p:nvSpPr>
@@ -12635,7 +12369,7 @@
           <a:bodyPr wrap="square" lIns="0" tIns="0" rIns="0" bIns="0" rtlCol="0" anchor="ctr"/>
           <a:lstStyle/>
           <a:p>
-            <a:pPr marL="0" indent="0">
+            <a:pPr indent="0" marL="0">
               <a:buNone/>
             </a:pPr>
             <a:r>
@@ -12674,7 +12408,7 @@
           <a:bodyPr wrap="square" lIns="0" tIns="0" rIns="0" bIns="0" rtlCol="0" anchor="ctr"/>
           <a:lstStyle/>
           <a:p>
-            <a:pPr marL="0" indent="0" algn="r">
+            <a:pPr algn="r" indent="0" marL="0">
               <a:buNone/>
             </a:pPr>
             <a:r>
@@ -12713,7 +12447,7 @@
           <a:bodyPr wrap="square" lIns="0" tIns="0" rIns="0" bIns="0" rtlCol="0" anchor="ctr"/>
           <a:lstStyle/>
           <a:p>
-            <a:pPr marL="0" indent="0">
+            <a:pPr indent="0" marL="0">
               <a:buNone/>
             </a:pPr>
             <a:r>
@@ -12752,7 +12486,7 @@
           <a:bodyPr wrap="square" lIns="0" tIns="0" rIns="0" bIns="0" rtlCol="0" anchor="ctr"/>
           <a:lstStyle/>
           <a:p>
-            <a:pPr marL="0" indent="0" algn="r">
+            <a:pPr algn="r" indent="0" marL="0">
               <a:buNone/>
             </a:pPr>
             <a:r>
@@ -12772,14 +12506,14 @@
       </p:sp>
       <p:pic>
         <p:nvPicPr>
-          <p:cNvPr id="7" name="Image 0" descr="H:\project\OpenGU\GULib-master\report\0417_5003report\figures\paper_figures\FIG-3_Spectrum.png"/>
+          <p:cNvPr id="7" name="Image 0" descr="H:\project\OpenGU\GULib-master\report\0417_5003report\figures\paper_figures\FIG-3_Spectrum.png">    </p:cNvPr>
           <p:cNvPicPr>
             <a:picLocks noChangeAspect="1"/>
           </p:cNvPicPr>
           <p:nvPr/>
         </p:nvPicPr>
         <p:blipFill>
-          <a:blip r:embed="rId3"/>
+          <a:blip r:embed="rId1"/>
           <a:stretch>
             <a:fillRect/>
           </a:stretch>
@@ -12815,7 +12549,7 @@
           <a:bodyPr wrap="square" lIns="0" tIns="0" rIns="0" bIns="0" rtlCol="0" anchor="ctr"/>
           <a:lstStyle/>
           <a:p>
-            <a:pPr marL="0" indent="0">
+            <a:pPr indent="0" marL="0">
               <a:buNone/>
             </a:pPr>
             <a:r>
@@ -13134,319 +12868,4 @@
     </a:ext>
   </a:extLst>
 </a:theme>
-</file>
-
-<file path=ppt/theme/theme2.xml><?xml version="1.0" encoding="utf-8"?>
-<a:theme xmlns:a="http://schemas.openxmlformats.org/drawingml/2006/main" name="Office 主题​​">
-  <a:themeElements>
-    <a:clrScheme name="Office">
-      <a:dk1>
-        <a:sysClr val="windowText" lastClr="000000"/>
-      </a:dk1>
-      <a:lt1>
-        <a:sysClr val="window" lastClr="FFFFFF"/>
-      </a:lt1>
-      <a:dk2>
-        <a:srgbClr val="0E2841"/>
-      </a:dk2>
-      <a:lt2>
-        <a:srgbClr val="E8E8E8"/>
-      </a:lt2>
-      <a:accent1>
-        <a:srgbClr val="156082"/>
-      </a:accent1>
-      <a:accent2>
-        <a:srgbClr val="E97132"/>
-      </a:accent2>
-      <a:accent3>
-        <a:srgbClr val="196B24"/>
-      </a:accent3>
-      <a:accent4>
-        <a:srgbClr val="0F9ED5"/>
-      </a:accent4>
-      <a:accent5>
-        <a:srgbClr val="A02B93"/>
-      </a:accent5>
-      <a:accent6>
-        <a:srgbClr val="4EA72E"/>
-      </a:accent6>
-      <a:hlink>
-        <a:srgbClr val="467886"/>
-      </a:hlink>
-      <a:folHlink>
-        <a:srgbClr val="96607D"/>
-      </a:folHlink>
-    </a:clrScheme>
-    <a:fontScheme name="Office">
-      <a:majorFont>
-        <a:latin typeface="等线 Light" panose="02110004020202020204"/>
-        <a:ea typeface=""/>
-        <a:cs typeface=""/>
-        <a:font script="Jpan" typeface="游ゴシック Light"/>
-        <a:font script="Hang" typeface="맑은 고딕"/>
-        <a:font script="Hans" typeface="等线 Light"/>
-        <a:font script="Hant" typeface="新細明體"/>
-        <a:font script="Arab" typeface="Times New Roman"/>
-        <a:font script="Hebr" typeface="Times New Roman"/>
-        <a:font script="Thai" typeface="Angsana New"/>
-        <a:font script="Ethi" typeface="Nyala"/>
-        <a:font script="Beng" typeface="Vrinda"/>
-        <a:font script="Gujr" typeface="Shruti"/>
-        <a:font script="Khmr" typeface="MoolBoran"/>
-        <a:font script="Knda" typeface="Tunga"/>
-        <a:font script="Guru" typeface="Raavi"/>
-        <a:font script="Cans" typeface="Euphemia"/>
-        <a:font script="Cher" typeface="Plantagenet Cherokee"/>
-        <a:font script="Yiii" typeface="Microsoft Yi Baiti"/>
-        <a:font script="Tibt" typeface="Microsoft Himalaya"/>
-        <a:font script="Thaa" typeface="MV Boli"/>
-        <a:font script="Deva" typeface="Mangal"/>
-        <a:font script="Telu" typeface="Gautami"/>
-        <a:font script="Taml" typeface="Latha"/>
-        <a:font script="Syrc" typeface="Estrangelo Edessa"/>
-        <a:font script="Orya" typeface="Kalinga"/>
-        <a:font script="Mlym" typeface="Kartika"/>
-        <a:font script="Laoo" typeface="DokChampa"/>
-        <a:font script="Sinh" typeface="Iskoola Pota"/>
-        <a:font script="Mong" typeface="Mongolian Baiti"/>
-        <a:font script="Viet" typeface="Times New Roman"/>
-        <a:font script="Uigh" typeface="Microsoft Uighur"/>
-        <a:font script="Geor" typeface="Sylfaen"/>
-        <a:font script="Armn" typeface="Arial"/>
-        <a:font script="Bugi" typeface="Leelawadee UI"/>
-        <a:font script="Bopo" typeface="Microsoft JhengHei"/>
-        <a:font script="Java" typeface="Javanese Text"/>
-        <a:font script="Lisu" typeface="Segoe UI"/>
-        <a:font script="Mymr" typeface="Myanmar Text"/>
-        <a:font script="Nkoo" typeface="Ebrima"/>
-        <a:font script="Olck" typeface="Nirmala UI"/>
-        <a:font script="Osma" typeface="Ebrima"/>
-        <a:font script="Phag" typeface="Phagspa"/>
-        <a:font script="Syrn" typeface="Estrangelo Edessa"/>
-        <a:font script="Syrj" typeface="Estrangelo Edessa"/>
-        <a:font script="Syre" typeface="Estrangelo Edessa"/>
-        <a:font script="Sora" typeface="Nirmala UI"/>
-        <a:font script="Tale" typeface="Microsoft Tai Le"/>
-        <a:font script="Talu" typeface="Microsoft New Tai Lue"/>
-        <a:font script="Tfng" typeface="Ebrima"/>
-      </a:majorFont>
-      <a:minorFont>
-        <a:latin typeface="等线" panose="02110004020202020204"/>
-        <a:ea typeface=""/>
-        <a:cs typeface=""/>
-        <a:font script="Jpan" typeface="游ゴシック"/>
-        <a:font script="Hang" typeface="맑은 고딕"/>
-        <a:font script="Hans" typeface="等线"/>
-        <a:font script="Hant" typeface="新細明體"/>
-        <a:font script="Arab" typeface="Arial"/>
-        <a:font script="Hebr" typeface="Arial"/>
-        <a:font script="Thai" typeface="Cordia New"/>
-        <a:font script="Ethi" typeface="Nyala"/>
-        <a:font script="Beng" typeface="Vrinda"/>
-        <a:font script="Gujr" typeface="Shruti"/>
-        <a:font script="Khmr" typeface="DaunPenh"/>
-        <a:font script="Knda" typeface="Tunga"/>
-        <a:font script="Guru" typeface="Raavi"/>
-        <a:font script="Cans" typeface="Euphemia"/>
-        <a:font script="Cher" typeface="Plantagenet Cherokee"/>
-        <a:font script="Yiii" typeface="Microsoft Yi Baiti"/>
-        <a:font script="Tibt" typeface="Microsoft Himalaya"/>
-        <a:font script="Thaa" typeface="MV Boli"/>
-        <a:font script="Deva" typeface="Mangal"/>
-        <a:font script="Telu" typeface="Gautami"/>
-        <a:font script="Taml" typeface="Latha"/>
-        <a:font script="Syrc" typeface="Estrangelo Edessa"/>
-        <a:font script="Orya" typeface="Kalinga"/>
-        <a:font script="Mlym" typeface="Kartika"/>
-        <a:font script="Laoo" typeface="DokChampa"/>
-        <a:font script="Sinh" typeface="Iskoola Pota"/>
-        <a:font script="Mong" typeface="Mongolian Baiti"/>
-        <a:font script="Viet" typeface="Arial"/>
-        <a:font script="Uigh" typeface="Microsoft Uighur"/>
-        <a:font script="Geor" typeface="Sylfaen"/>
-        <a:font script="Armn" typeface="Arial"/>
-        <a:font script="Bugi" typeface="Leelawadee UI"/>
-        <a:font script="Bopo" typeface="Microsoft JhengHei"/>
-        <a:font script="Java" typeface="Javanese Text"/>
-        <a:font script="Lisu" typeface="Segoe UI"/>
-        <a:font script="Mymr" typeface="Myanmar Text"/>
-        <a:font script="Nkoo" typeface="Ebrima"/>
-        <a:font script="Olck" typeface="Nirmala UI"/>
-        <a:font script="Osma" typeface="Ebrima"/>
-        <a:font script="Phag" typeface="Phagspa"/>
-        <a:font script="Syrn" typeface="Estrangelo Edessa"/>
-        <a:font script="Syrj" typeface="Estrangelo Edessa"/>
-        <a:font script="Syre" typeface="Estrangelo Edessa"/>
-        <a:font script="Sora" typeface="Nirmala UI"/>
-        <a:font script="Tale" typeface="Microsoft Tai Le"/>
-        <a:font script="Talu" typeface="Microsoft New Tai Lue"/>
-        <a:font script="Tfng" typeface="Ebrima"/>
-      </a:minorFont>
-    </a:fontScheme>
-    <a:fmtScheme name="Office">
-      <a:fillStyleLst>
-        <a:solidFill>
-          <a:schemeClr val="phClr"/>
-        </a:solidFill>
-        <a:gradFill rotWithShape="1">
-          <a:gsLst>
-            <a:gs pos="0">
-              <a:schemeClr val="phClr">
-                <a:lumMod val="110000"/>
-                <a:satMod val="105000"/>
-                <a:tint val="67000"/>
-              </a:schemeClr>
-            </a:gs>
-            <a:gs pos="50000">
-              <a:schemeClr val="phClr">
-                <a:lumMod val="105000"/>
-                <a:satMod val="103000"/>
-                <a:tint val="73000"/>
-              </a:schemeClr>
-            </a:gs>
-            <a:gs pos="100000">
-              <a:schemeClr val="phClr">
-                <a:lumMod val="105000"/>
-                <a:satMod val="109000"/>
-                <a:tint val="81000"/>
-              </a:schemeClr>
-            </a:gs>
-          </a:gsLst>
-          <a:lin ang="5400000" scaled="0"/>
-        </a:gradFill>
-        <a:gradFill rotWithShape="1">
-          <a:gsLst>
-            <a:gs pos="0">
-              <a:schemeClr val="phClr">
-                <a:satMod val="103000"/>
-                <a:lumMod val="102000"/>
-                <a:tint val="94000"/>
-              </a:schemeClr>
-            </a:gs>
-            <a:gs pos="50000">
-              <a:schemeClr val="phClr">
-                <a:satMod val="110000"/>
-                <a:lumMod val="100000"/>
-                <a:shade val="100000"/>
-              </a:schemeClr>
-            </a:gs>
-            <a:gs pos="100000">
-              <a:schemeClr val="phClr">
-                <a:lumMod val="99000"/>
-                <a:satMod val="120000"/>
-                <a:shade val="78000"/>
-              </a:schemeClr>
-            </a:gs>
-          </a:gsLst>
-          <a:lin ang="5400000" scaled="0"/>
-        </a:gradFill>
-      </a:fillStyleLst>
-      <a:lnStyleLst>
-        <a:ln w="12700" cap="flat" cmpd="sng" algn="ctr">
-          <a:solidFill>
-            <a:schemeClr val="phClr"/>
-          </a:solidFill>
-          <a:prstDash val="solid"/>
-          <a:miter lim="800000"/>
-        </a:ln>
-        <a:ln w="19050" cap="flat" cmpd="sng" algn="ctr">
-          <a:solidFill>
-            <a:schemeClr val="phClr"/>
-          </a:solidFill>
-          <a:prstDash val="solid"/>
-          <a:miter lim="800000"/>
-        </a:ln>
-        <a:ln w="25400" cap="flat" cmpd="sng" algn="ctr">
-          <a:solidFill>
-            <a:schemeClr val="phClr"/>
-          </a:solidFill>
-          <a:prstDash val="solid"/>
-          <a:miter lim="800000"/>
-        </a:ln>
-      </a:lnStyleLst>
-      <a:effectStyleLst>
-        <a:effectStyle>
-          <a:effectLst/>
-        </a:effectStyle>
-        <a:effectStyle>
-          <a:effectLst/>
-        </a:effectStyle>
-        <a:effectStyle>
-          <a:effectLst>
-            <a:outerShdw blurRad="57150" dist="19050" dir="5400000" algn="ctr" rotWithShape="0">
-              <a:srgbClr val="000000">
-                <a:alpha val="63000"/>
-              </a:srgbClr>
-            </a:outerShdw>
-          </a:effectLst>
-        </a:effectStyle>
-      </a:effectStyleLst>
-      <a:bgFillStyleLst>
-        <a:solidFill>
-          <a:schemeClr val="phClr"/>
-        </a:solidFill>
-        <a:solidFill>
-          <a:schemeClr val="phClr">
-            <a:tint val="95000"/>
-            <a:satMod val="170000"/>
-          </a:schemeClr>
-        </a:solidFill>
-        <a:gradFill rotWithShape="1">
-          <a:gsLst>
-            <a:gs pos="0">
-              <a:schemeClr val="phClr">
-                <a:tint val="93000"/>
-                <a:satMod val="150000"/>
-                <a:shade val="98000"/>
-                <a:lumMod val="102000"/>
-              </a:schemeClr>
-            </a:gs>
-            <a:gs pos="50000">
-              <a:schemeClr val="phClr">
-                <a:tint val="98000"/>
-                <a:satMod val="130000"/>
-                <a:shade val="90000"/>
-                <a:lumMod val="103000"/>
-              </a:schemeClr>
-            </a:gs>
-            <a:gs pos="100000">
-              <a:schemeClr val="phClr">
-                <a:shade val="63000"/>
-                <a:satMod val="120000"/>
-              </a:schemeClr>
-            </a:gs>
-          </a:gsLst>
-          <a:lin ang="5400000" scaled="0"/>
-        </a:gradFill>
-      </a:bgFillStyleLst>
-    </a:fmtScheme>
-  </a:themeElements>
-  <a:objectDefaults>
-    <a:lnDef>
-      <a:spPr/>
-      <a:bodyPr/>
-      <a:lstStyle/>
-      <a:style>
-        <a:lnRef idx="2">
-          <a:schemeClr val="accent1"/>
-        </a:lnRef>
-        <a:fillRef idx="0">
-          <a:schemeClr val="accent1"/>
-        </a:fillRef>
-        <a:effectRef idx="1">
-          <a:schemeClr val="accent1"/>
-        </a:effectRef>
-        <a:fontRef idx="minor">
-          <a:schemeClr val="tx1"/>
-        </a:fontRef>
-      </a:style>
-    </a:lnDef>
-  </a:objectDefaults>
-  <a:extraClrSchemeLst/>
-  <a:extLst>
-    <a:ext uri="{05A4C25C-085E-4340-85A3-A5531E510DB2}">
-      <thm15:themeFamily xmlns:thm15="http://schemas.microsoft.com/office/thememl/2012/main" name="Office Theme" id="{2E142A2C-CD16-42D6-873A-C26D2A0506FA}" vid="{1BDDFF52-6CD6-40A5-AB3C-68EB2F1E4D0A}"/>
-    </a:ext>
-  </a:extLst>
-</a:theme>
 </file>
--- a/GULib-master/report/0417_5003report/ppt/out-export-check/final_15min_defense.pptx
+++ b/GULib-master/report/0417_5003report/ppt/out-export-check/final_15min_defense.pptx
@@ -2394,7 +2394,7 @@
         </p:nvSpPr>
         <p:spPr>
           <a:xfrm>
-            <a:off x="6611112" y="1280160"/>
+            <a:off x="6611112" y="1353312"/>
             <a:ext cx="1691640" cy="182880"/>
           </a:xfrm>
           <a:prstGeom prst="rect">
@@ -2433,8 +2433,8 @@
         </p:nvSpPr>
         <p:spPr>
           <a:xfrm>
-            <a:off x="6611112" y="1527048"/>
-            <a:ext cx="1691640" cy="1216152"/>
+            <a:off x="6611112" y="1600200"/>
+            <a:ext cx="1691640" cy="1143000"/>
           </a:xfrm>
           <a:prstGeom prst="rect">
             <a:avLst/>
@@ -3043,7 +3043,7 @@
         </p:nvSpPr>
         <p:spPr>
           <a:xfrm>
-            <a:off x="6153912" y="1051560"/>
+            <a:off x="6153912" y="1124712"/>
             <a:ext cx="2084832" cy="182880"/>
           </a:xfrm>
           <a:prstGeom prst="rect">
@@ -3082,8 +3082,8 @@
         </p:nvSpPr>
         <p:spPr>
           <a:xfrm>
-            <a:off x="6153912" y="1298448"/>
-            <a:ext cx="2084832" cy="576072"/>
+            <a:off x="6153912" y="1371600"/>
+            <a:ext cx="2084832" cy="502920"/>
           </a:xfrm>
           <a:prstGeom prst="rect">
             <a:avLst/>
@@ -3150,7 +3150,7 @@
         </p:nvSpPr>
         <p:spPr>
           <a:xfrm>
-            <a:off x="6153912" y="2148840"/>
+            <a:off x="6153912" y="2221992"/>
             <a:ext cx="2084832" cy="182880"/>
           </a:xfrm>
           <a:prstGeom prst="rect">
@@ -3189,8 +3189,8 @@
         </p:nvSpPr>
         <p:spPr>
           <a:xfrm>
-            <a:off x="6153912" y="2395728"/>
-            <a:ext cx="2084832" cy="621792"/>
+            <a:off x="6153912" y="2468880"/>
+            <a:ext cx="2084832" cy="548640"/>
           </a:xfrm>
           <a:prstGeom prst="rect">
             <a:avLst/>
@@ -3257,7 +3257,7 @@
         </p:nvSpPr>
         <p:spPr>
           <a:xfrm>
-            <a:off x="6153912" y="3291840"/>
+            <a:off x="6153912" y="3364992"/>
             <a:ext cx="2084832" cy="182880"/>
           </a:xfrm>
           <a:prstGeom prst="rect">
@@ -3296,8 +3296,8 @@
         </p:nvSpPr>
         <p:spPr>
           <a:xfrm>
-            <a:off x="6153912" y="3538728"/>
-            <a:ext cx="2084832" cy="621792"/>
+            <a:off x="6153912" y="3611880"/>
+            <a:ext cx="2084832" cy="548640"/>
           </a:xfrm>
           <a:prstGeom prst="rect">
             <a:avLst/>
@@ -3618,7 +3618,7 @@
         </p:nvSpPr>
         <p:spPr>
           <a:xfrm>
-            <a:off x="850392" y="1463040"/>
+            <a:off x="850392" y="1536192"/>
             <a:ext cx="2212848" cy="182880"/>
           </a:xfrm>
           <a:prstGeom prst="rect">
@@ -3657,8 +3657,8 @@
         </p:nvSpPr>
         <p:spPr>
           <a:xfrm>
-            <a:off x="850392" y="1709928"/>
-            <a:ext cx="2212848" cy="2112264"/>
+            <a:off x="850392" y="1783080"/>
+            <a:ext cx="2212848" cy="2039112"/>
           </a:xfrm>
           <a:prstGeom prst="rect">
             <a:avLst/>
@@ -3725,7 +3725,7 @@
         </p:nvSpPr>
         <p:spPr>
           <a:xfrm>
-            <a:off x="3474720" y="1463040"/>
+            <a:off x="3474720" y="1536192"/>
             <a:ext cx="2212848" cy="182880"/>
           </a:xfrm>
           <a:prstGeom prst="rect">
@@ -3764,8 +3764,8 @@
         </p:nvSpPr>
         <p:spPr>
           <a:xfrm>
-            <a:off x="3474720" y="1709928"/>
-            <a:ext cx="2212848" cy="2112264"/>
+            <a:off x="3474720" y="1783080"/>
+            <a:ext cx="2212848" cy="2039112"/>
           </a:xfrm>
           <a:prstGeom prst="rect">
             <a:avLst/>
@@ -3832,7 +3832,7 @@
         </p:nvSpPr>
         <p:spPr>
           <a:xfrm>
-            <a:off x="6099048" y="1463040"/>
+            <a:off x="6099048" y="1536192"/>
             <a:ext cx="2212848" cy="182880"/>
           </a:xfrm>
           <a:prstGeom prst="rect">
@@ -3871,8 +3871,8 @@
         </p:nvSpPr>
         <p:spPr>
           <a:xfrm>
-            <a:off x="6099048" y="1709928"/>
-            <a:ext cx="2212848" cy="2112264"/>
+            <a:off x="6099048" y="1783080"/>
+            <a:ext cx="2212848" cy="2039112"/>
           </a:xfrm>
           <a:prstGeom prst="rect">
             <a:avLst/>
@@ -4326,7 +4326,7 @@
         </p:nvSpPr>
         <p:spPr>
           <a:xfrm>
-            <a:off x="5806440" y="1097280"/>
+            <a:off x="5806440" y="1170432"/>
             <a:ext cx="2423160" cy="182880"/>
           </a:xfrm>
           <a:prstGeom prst="rect">
@@ -4365,8 +4365,8 @@
         </p:nvSpPr>
         <p:spPr>
           <a:xfrm>
-            <a:off x="5806440" y="1344168"/>
-            <a:ext cx="2423160" cy="621792"/>
+            <a:off x="5806440" y="1417320"/>
+            <a:ext cx="2423160" cy="548640"/>
           </a:xfrm>
           <a:prstGeom prst="rect">
             <a:avLst/>
@@ -4433,7 +4433,7 @@
         </p:nvSpPr>
         <p:spPr>
           <a:xfrm>
-            <a:off x="5806440" y="2240280"/>
+            <a:off x="5806440" y="2313432"/>
             <a:ext cx="2423160" cy="182880"/>
           </a:xfrm>
           <a:prstGeom prst="rect">
@@ -4472,8 +4472,8 @@
         </p:nvSpPr>
         <p:spPr>
           <a:xfrm>
-            <a:off x="5806440" y="2487168"/>
-            <a:ext cx="2423160" cy="621792"/>
+            <a:off x="5806440" y="2560320"/>
+            <a:ext cx="2423160" cy="548640"/>
           </a:xfrm>
           <a:prstGeom prst="rect">
             <a:avLst/>
@@ -4540,7 +4540,7 @@
         </p:nvSpPr>
         <p:spPr>
           <a:xfrm>
-            <a:off x="5806440" y="3383280"/>
+            <a:off x="5806440" y="3456432"/>
             <a:ext cx="2423160" cy="182880"/>
           </a:xfrm>
           <a:prstGeom prst="rect">
@@ -4579,8 +4579,8 @@
         </p:nvSpPr>
         <p:spPr>
           <a:xfrm>
-            <a:off x="5806440" y="3630168"/>
-            <a:ext cx="2423160" cy="530352"/>
+            <a:off x="5806440" y="3703320"/>
+            <a:ext cx="2423160" cy="457200"/>
           </a:xfrm>
           <a:prstGeom prst="rect">
             <a:avLst/>
@@ -4988,7 +4988,7 @@
         </p:nvSpPr>
         <p:spPr>
           <a:xfrm>
-            <a:off x="960120" y="4114800"/>
+            <a:off x="960120" y="4187952"/>
             <a:ext cx="2971800" cy="182880"/>
           </a:xfrm>
           <a:prstGeom prst="rect">
@@ -5027,8 +5027,8 @@
         </p:nvSpPr>
         <p:spPr>
           <a:xfrm>
-            <a:off x="960120" y="4361688"/>
-            <a:ext cx="2971800" cy="256032"/>
+            <a:off x="960120" y="4434840"/>
+            <a:ext cx="2971800" cy="182880"/>
           </a:xfrm>
           <a:prstGeom prst="rect">
             <a:avLst/>
@@ -5095,7 +5095,7 @@
         </p:nvSpPr>
         <p:spPr>
           <a:xfrm>
-            <a:off x="5120640" y="4114800"/>
+            <a:off x="5120640" y="4187952"/>
             <a:ext cx="2971800" cy="182880"/>
           </a:xfrm>
           <a:prstGeom prst="rect">
@@ -5134,8 +5134,8 @@
         </p:nvSpPr>
         <p:spPr>
           <a:xfrm>
-            <a:off x="5120640" y="4361688"/>
-            <a:ext cx="2971800" cy="256032"/>
+            <a:off x="5120640" y="4434840"/>
+            <a:ext cx="2971800" cy="182880"/>
           </a:xfrm>
           <a:prstGeom prst="rect">
             <a:avLst/>
@@ -5456,7 +5456,7 @@
         </p:nvSpPr>
         <p:spPr>
           <a:xfrm>
-            <a:off x="886968" y="1481328"/>
+            <a:off x="886968" y="1554480"/>
             <a:ext cx="2423160" cy="182880"/>
           </a:xfrm>
           <a:prstGeom prst="rect">
@@ -5495,8 +5495,8 @@
         </p:nvSpPr>
         <p:spPr>
           <a:xfrm>
-            <a:off x="886968" y="1728216"/>
-            <a:ext cx="2423160" cy="594360"/>
+            <a:off x="886968" y="1801368"/>
+            <a:ext cx="2423160" cy="521208"/>
           </a:xfrm>
           <a:prstGeom prst="rect">
             <a:avLst/>
@@ -5563,7 +5563,7 @@
         </p:nvSpPr>
         <p:spPr>
           <a:xfrm>
-            <a:off x="886968" y="2779776"/>
+            <a:off x="886968" y="2852928"/>
             <a:ext cx="2423160" cy="182880"/>
           </a:xfrm>
           <a:prstGeom prst="rect">
@@ -5602,8 +5602,8 @@
         </p:nvSpPr>
         <p:spPr>
           <a:xfrm>
-            <a:off x="886968" y="3026664"/>
-            <a:ext cx="2423160" cy="594360"/>
+            <a:off x="886968" y="3099816"/>
+            <a:ext cx="2423160" cy="521208"/>
           </a:xfrm>
           <a:prstGeom prst="rect">
             <a:avLst/>
@@ -5670,7 +5670,7 @@
         </p:nvSpPr>
         <p:spPr>
           <a:xfrm>
-            <a:off x="3840480" y="1481328"/>
+            <a:off x="3840480" y="1554480"/>
             <a:ext cx="2423160" cy="182880"/>
           </a:xfrm>
           <a:prstGeom prst="rect">
@@ -5709,8 +5709,8 @@
         </p:nvSpPr>
         <p:spPr>
           <a:xfrm>
-            <a:off x="3840480" y="1728216"/>
-            <a:ext cx="2423160" cy="594360"/>
+            <a:off x="3840480" y="1801368"/>
+            <a:ext cx="2423160" cy="521208"/>
           </a:xfrm>
           <a:prstGeom prst="rect">
             <a:avLst/>
@@ -5777,7 +5777,7 @@
         </p:nvSpPr>
         <p:spPr>
           <a:xfrm>
-            <a:off x="3840480" y="2779776"/>
+            <a:off x="3840480" y="2852928"/>
             <a:ext cx="2423160" cy="182880"/>
           </a:xfrm>
           <a:prstGeom prst="rect">
@@ -5816,8 +5816,8 @@
         </p:nvSpPr>
         <p:spPr>
           <a:xfrm>
-            <a:off x="3840480" y="3026664"/>
-            <a:ext cx="2423160" cy="594360"/>
+            <a:off x="3840480" y="3099816"/>
+            <a:ext cx="2423160" cy="521208"/>
           </a:xfrm>
           <a:prstGeom prst="rect">
             <a:avLst/>
@@ -6054,7 +6054,7 @@
         </p:nvSpPr>
         <p:spPr>
           <a:xfrm>
-            <a:off x="777240" y="1325880"/>
+            <a:off x="777240" y="1234440"/>
             <a:ext cx="2331720" cy="2194560"/>
           </a:xfrm>
           <a:prstGeom prst="roundRect">
@@ -6081,7 +6081,7 @@
         </p:nvSpPr>
         <p:spPr>
           <a:xfrm>
-            <a:off x="914400" y="1417320"/>
+            <a:off x="914400" y="1399032"/>
             <a:ext cx="2057400" cy="182880"/>
           </a:xfrm>
           <a:prstGeom prst="rect">
@@ -6100,7 +6100,7 @@
             <a:r>
               <a:rPr lang="en-US" sz="1700" b="1" dirty="0">
                 <a:solidFill>
-                  <a:srgbClr val="16263F"/>
+                  <a:srgbClr val="223A5E"/>
                 </a:solidFill>
                 <a:latin typeface="Times New Roman" pitchFamily="34" charset="0"/>
                 <a:ea typeface="Times New Roman" pitchFamily="34" charset="-122"/>
@@ -6120,8 +6120,8 @@
         </p:nvSpPr>
         <p:spPr>
           <a:xfrm>
-            <a:off x="914400" y="1664208"/>
-            <a:ext cx="2057400" cy="1764792"/>
+            <a:off x="914400" y="1645920"/>
+            <a:ext cx="2057400" cy="1691640"/>
           </a:xfrm>
           <a:prstGeom prst="rect">
             <a:avLst/>
@@ -6161,7 +6161,7 @@
         </p:nvSpPr>
         <p:spPr>
           <a:xfrm>
-            <a:off x="3401568" y="1325880"/>
+            <a:off x="3401568" y="1234440"/>
             <a:ext cx="2331720" cy="2194560"/>
           </a:xfrm>
           <a:prstGeom prst="roundRect">
@@ -6188,7 +6188,7 @@
         </p:nvSpPr>
         <p:spPr>
           <a:xfrm>
-            <a:off x="3538728" y="1417320"/>
+            <a:off x="3538728" y="1399032"/>
             <a:ext cx="2057400" cy="182880"/>
           </a:xfrm>
           <a:prstGeom prst="rect">
@@ -6207,7 +6207,7 @@
             <a:r>
               <a:rPr lang="en-US" sz="1700" b="1" dirty="0">
                 <a:solidFill>
-                  <a:srgbClr val="A6404B"/>
+                  <a:srgbClr val="223A5E"/>
                 </a:solidFill>
                 <a:latin typeface="Times New Roman" pitchFamily="34" charset="0"/>
                 <a:ea typeface="Times New Roman" pitchFamily="34" charset="-122"/>
@@ -6227,8 +6227,8 @@
         </p:nvSpPr>
         <p:spPr>
           <a:xfrm>
-            <a:off x="3538728" y="1664208"/>
-            <a:ext cx="2057400" cy="1764792"/>
+            <a:off x="3538728" y="1645920"/>
+            <a:ext cx="2057400" cy="1691640"/>
           </a:xfrm>
           <a:prstGeom prst="rect">
             <a:avLst/>
@@ -6268,7 +6268,7 @@
         </p:nvSpPr>
         <p:spPr>
           <a:xfrm>
-            <a:off x="6025896" y="1325880"/>
+            <a:off x="6025896" y="1234440"/>
             <a:ext cx="2331720" cy="2194560"/>
           </a:xfrm>
           <a:prstGeom prst="roundRect">
@@ -6277,11 +6277,11 @@
             </a:avLst>
           </a:prstGeom>
           <a:solidFill>
-            <a:srgbClr val="E8EEF5"/>
+            <a:srgbClr val="FFFFFF"/>
           </a:solidFill>
           <a:ln w="13970">
             <a:solidFill>
-              <a:srgbClr val="E8EEF5"/>
+              <a:srgbClr val="D9DEE7"/>
             </a:solidFill>
             <a:prstDash val="solid"/>
           </a:ln>
@@ -6295,7 +6295,7 @@
         </p:nvSpPr>
         <p:spPr>
           <a:xfrm>
-            <a:off x="6163056" y="1417320"/>
+            <a:off x="6163056" y="1399032"/>
             <a:ext cx="2057400" cy="182880"/>
           </a:xfrm>
           <a:prstGeom prst="rect">
@@ -6334,8 +6334,8 @@
         </p:nvSpPr>
         <p:spPr>
           <a:xfrm>
-            <a:off x="6163056" y="1664208"/>
-            <a:ext cx="2057400" cy="1764792"/>
+            <a:off x="6163056" y="1645920"/>
+            <a:ext cx="2057400" cy="1691640"/>
           </a:xfrm>
           <a:prstGeom prst="rect">
             <a:avLst/>
@@ -6375,8 +6375,8 @@
         </p:nvSpPr>
         <p:spPr>
           <a:xfrm>
-            <a:off x="713232" y="4160520"/>
-            <a:ext cx="7772400" cy="274320"/>
+            <a:off x="713232" y="3886200"/>
+            <a:ext cx="7772400" cy="411480"/>
           </a:xfrm>
           <a:prstGeom prst="rect">
             <a:avLst/>
@@ -6392,7 +6392,7 @@
               <a:buNone/>
             </a:pPr>
             <a:r>
-              <a:rPr lang="en-US" sz="2400" b="1" dirty="0">
+              <a:rPr lang="en-US" sz="3200" b="1" dirty="0">
                 <a:solidFill>
                   <a:srgbClr val="FFFFFF"/>
                 </a:solidFill>
@@ -6402,7 +6402,7 @@
               </a:rPr>
               <a:t>Thank you. Q&amp;A</a:t>
             </a:r>
-            <a:endParaRPr lang="en-US" sz="2400" dirty="0"/>
+            <a:endParaRPr lang="en-US" sz="3200" dirty="0"/>
           </a:p>
         </p:txBody>
       </p:sp>
@@ -7404,7 +7404,7 @@
         </p:nvSpPr>
         <p:spPr>
           <a:xfrm>
-            <a:off x="777240" y="1005840"/>
+            <a:off x="777240" y="1078992"/>
             <a:ext cx="7589520" cy="182880"/>
           </a:xfrm>
           <a:prstGeom prst="rect">
@@ -7443,8 +7443,8 @@
         </p:nvSpPr>
         <p:spPr>
           <a:xfrm>
-            <a:off x="777240" y="1252728"/>
-            <a:ext cx="7589520" cy="438912"/>
+            <a:off x="777240" y="1325880"/>
+            <a:ext cx="7589520" cy="365760"/>
           </a:xfrm>
           <a:prstGeom prst="rect">
             <a:avLst/>
@@ -7511,7 +7511,7 @@
         </p:nvSpPr>
         <p:spPr>
           <a:xfrm>
-            <a:off x="914400" y="2240280"/>
+            <a:off x="914400" y="2313432"/>
             <a:ext cx="3337560" cy="182880"/>
           </a:xfrm>
           <a:prstGeom prst="rect">
@@ -7550,8 +7550,8 @@
         </p:nvSpPr>
         <p:spPr>
           <a:xfrm>
-            <a:off x="914400" y="2487168"/>
-            <a:ext cx="3337560" cy="466344"/>
+            <a:off x="914400" y="2560320"/>
+            <a:ext cx="3337560" cy="393192"/>
           </a:xfrm>
           <a:prstGeom prst="rect">
             <a:avLst/>
@@ -7618,7 +7618,7 @@
         </p:nvSpPr>
         <p:spPr>
           <a:xfrm>
-            <a:off x="4800600" y="2240280"/>
+            <a:off x="4800600" y="2313432"/>
             <a:ext cx="3337560" cy="182880"/>
           </a:xfrm>
           <a:prstGeom prst="rect">
@@ -7657,8 +7657,8 @@
         </p:nvSpPr>
         <p:spPr>
           <a:xfrm>
-            <a:off x="4800600" y="2487168"/>
-            <a:ext cx="3337560" cy="466344"/>
+            <a:off x="4800600" y="2560320"/>
+            <a:ext cx="3337560" cy="393192"/>
           </a:xfrm>
           <a:prstGeom prst="rect">
             <a:avLst/>
@@ -7725,7 +7725,7 @@
         </p:nvSpPr>
         <p:spPr>
           <a:xfrm>
-            <a:off x="914400" y="3383280"/>
+            <a:off x="914400" y="3456432"/>
             <a:ext cx="3337560" cy="182880"/>
           </a:xfrm>
           <a:prstGeom prst="rect">
@@ -7764,8 +7764,8 @@
         </p:nvSpPr>
         <p:spPr>
           <a:xfrm>
-            <a:off x="914400" y="3630168"/>
-            <a:ext cx="3337560" cy="466344"/>
+            <a:off x="914400" y="3703320"/>
+            <a:ext cx="3337560" cy="393192"/>
           </a:xfrm>
           <a:prstGeom prst="rect">
             <a:avLst/>
@@ -7832,7 +7832,7 @@
         </p:nvSpPr>
         <p:spPr>
           <a:xfrm>
-            <a:off x="4800600" y="3383280"/>
+            <a:off x="4800600" y="3456432"/>
             <a:ext cx="3337560" cy="182880"/>
           </a:xfrm>
           <a:prstGeom prst="rect">
@@ -7871,8 +7871,8 @@
         </p:nvSpPr>
         <p:spPr>
           <a:xfrm>
-            <a:off x="4800600" y="3630168"/>
-            <a:ext cx="3337560" cy="466344"/>
+            <a:off x="4800600" y="3703320"/>
+            <a:ext cx="3337560" cy="393192"/>
           </a:xfrm>
           <a:prstGeom prst="rect">
             <a:avLst/>
@@ -8193,7 +8193,7 @@
         </p:nvSpPr>
         <p:spPr>
           <a:xfrm>
-            <a:off x="795528" y="1143000"/>
+            <a:off x="795528" y="1216152"/>
             <a:ext cx="2606040" cy="182880"/>
           </a:xfrm>
           <a:prstGeom prst="rect">
@@ -8232,8 +8232,8 @@
         </p:nvSpPr>
         <p:spPr>
           <a:xfrm>
-            <a:off x="795528" y="1389888"/>
-            <a:ext cx="2606040" cy="530352"/>
+            <a:off x="795528" y="1463040"/>
+            <a:ext cx="2606040" cy="457200"/>
           </a:xfrm>
           <a:prstGeom prst="rect">
             <a:avLst/>
@@ -8300,7 +8300,7 @@
         </p:nvSpPr>
         <p:spPr>
           <a:xfrm>
-            <a:off x="795528" y="2240280"/>
+            <a:off x="795528" y="2313432"/>
             <a:ext cx="2606040" cy="182880"/>
           </a:xfrm>
           <a:prstGeom prst="rect">
@@ -8339,8 +8339,8 @@
         </p:nvSpPr>
         <p:spPr>
           <a:xfrm>
-            <a:off x="795528" y="2487168"/>
-            <a:ext cx="2606040" cy="530352"/>
+            <a:off x="795528" y="2560320"/>
+            <a:ext cx="2606040" cy="457200"/>
           </a:xfrm>
           <a:prstGeom prst="rect">
             <a:avLst/>
@@ -8407,7 +8407,7 @@
         </p:nvSpPr>
         <p:spPr>
           <a:xfrm>
-            <a:off x="795528" y="3337560"/>
+            <a:off x="795528" y="3410712"/>
             <a:ext cx="2606040" cy="182880"/>
           </a:xfrm>
           <a:prstGeom prst="rect">
@@ -8446,8 +8446,8 @@
         </p:nvSpPr>
         <p:spPr>
           <a:xfrm>
-            <a:off x="795528" y="3584448"/>
-            <a:ext cx="2606040" cy="530352"/>
+            <a:off x="795528" y="3657600"/>
+            <a:ext cx="2606040" cy="457200"/>
           </a:xfrm>
           <a:prstGeom prst="rect">
             <a:avLst/>
@@ -8514,7 +8514,7 @@
         </p:nvSpPr>
         <p:spPr>
           <a:xfrm>
-            <a:off x="4069080" y="1143000"/>
+            <a:off x="4069080" y="1216152"/>
             <a:ext cx="4251960" cy="182880"/>
           </a:xfrm>
           <a:prstGeom prst="rect">
@@ -8553,8 +8553,8 @@
         </p:nvSpPr>
         <p:spPr>
           <a:xfrm>
-            <a:off x="4069080" y="1389888"/>
-            <a:ext cx="4251960" cy="1490472"/>
+            <a:off x="4069080" y="1463040"/>
+            <a:ext cx="4251960" cy="1417320"/>
           </a:xfrm>
           <a:prstGeom prst="rect">
             <a:avLst/>
@@ -9940,7 +9940,7 @@
         </p:nvSpPr>
         <p:spPr>
           <a:xfrm>
-            <a:off x="4937760" y="1463040"/>
+            <a:off x="4937760" y="1536192"/>
             <a:ext cx="3337560" cy="182880"/>
           </a:xfrm>
           <a:prstGeom prst="rect">
@@ -9979,8 +9979,8 @@
         </p:nvSpPr>
         <p:spPr>
           <a:xfrm>
-            <a:off x="4937760" y="1709928"/>
-            <a:ext cx="3337560" cy="2843784"/>
+            <a:off x="4937760" y="1783080"/>
+            <a:ext cx="3337560" cy="2770632"/>
           </a:xfrm>
           <a:prstGeom prst="rect">
             <a:avLst/>
@@ -10392,7 +10392,7 @@
         </p:nvSpPr>
         <p:spPr>
           <a:xfrm>
-            <a:off x="850392" y="1417320"/>
+            <a:off x="850392" y="1490472"/>
             <a:ext cx="2212848" cy="182880"/>
           </a:xfrm>
           <a:prstGeom prst="rect">
@@ -10431,8 +10431,8 @@
         </p:nvSpPr>
         <p:spPr>
           <a:xfrm>
-            <a:off x="850392" y="1664208"/>
-            <a:ext cx="2212848" cy="1600200"/>
+            <a:off x="850392" y="1737360"/>
+            <a:ext cx="2212848" cy="1527048"/>
           </a:xfrm>
           <a:prstGeom prst="rect">
             <a:avLst/>
@@ -10539,7 +10539,7 @@
         </p:nvSpPr>
         <p:spPr>
           <a:xfrm>
-            <a:off x="3465576" y="1417320"/>
+            <a:off x="3465576" y="1490472"/>
             <a:ext cx="2212848" cy="182880"/>
           </a:xfrm>
           <a:prstGeom prst="rect">
@@ -10578,8 +10578,8 @@
         </p:nvSpPr>
         <p:spPr>
           <a:xfrm>
-            <a:off x="3465576" y="1664208"/>
-            <a:ext cx="2212848" cy="1600200"/>
+            <a:off x="3465576" y="1737360"/>
+            <a:ext cx="2212848" cy="1527048"/>
           </a:xfrm>
           <a:prstGeom prst="rect">
             <a:avLst/>
@@ -10686,7 +10686,7 @@
         </p:nvSpPr>
         <p:spPr>
           <a:xfrm>
-            <a:off x="6080760" y="1417320"/>
+            <a:off x="6080760" y="1490472"/>
             <a:ext cx="2212848" cy="182880"/>
           </a:xfrm>
           <a:prstGeom prst="rect">
@@ -10725,8 +10725,8 @@
         </p:nvSpPr>
         <p:spPr>
           <a:xfrm>
-            <a:off x="6080760" y="1664208"/>
-            <a:ext cx="2212848" cy="1600200"/>
+            <a:off x="6080760" y="1737360"/>
+            <a:ext cx="2212848" cy="1527048"/>
           </a:xfrm>
           <a:prstGeom prst="rect">
             <a:avLst/>
@@ -10816,7 +10816,7 @@
         </p:nvSpPr>
         <p:spPr>
           <a:xfrm>
-            <a:off x="1216152" y="3895344"/>
+            <a:off x="1216152" y="3968496"/>
             <a:ext cx="6638544" cy="182880"/>
           </a:xfrm>
           <a:prstGeom prst="rect">
@@ -10855,8 +10855,8 @@
         </p:nvSpPr>
         <p:spPr>
           <a:xfrm>
-            <a:off x="1216152" y="4142232"/>
-            <a:ext cx="6638544" cy="265176"/>
+            <a:off x="1216152" y="4215384"/>
+            <a:ext cx="6638544" cy="192024"/>
           </a:xfrm>
           <a:prstGeom prst="rect">
             <a:avLst/>
@@ -11177,7 +11177,7 @@
         </p:nvSpPr>
         <p:spPr>
           <a:xfrm>
-            <a:off x="850392" y="1417320"/>
+            <a:off x="850392" y="1490472"/>
             <a:ext cx="2267712" cy="182880"/>
           </a:xfrm>
           <a:prstGeom prst="rect">
@@ -11216,8 +11216,8 @@
         </p:nvSpPr>
         <p:spPr>
           <a:xfrm>
-            <a:off x="850392" y="1664208"/>
-            <a:ext cx="2267712" cy="1719072"/>
+            <a:off x="850392" y="1737360"/>
+            <a:ext cx="2267712" cy="1645920"/>
           </a:xfrm>
           <a:prstGeom prst="rect">
             <a:avLst/>
@@ -11307,7 +11307,7 @@
         </p:nvSpPr>
         <p:spPr>
           <a:xfrm>
-            <a:off x="3465576" y="1417320"/>
+            <a:off x="3465576" y="1490472"/>
             <a:ext cx="2267712" cy="182880"/>
           </a:xfrm>
           <a:prstGeom prst="rect">
@@ -11346,8 +11346,8 @@
         </p:nvSpPr>
         <p:spPr>
           <a:xfrm>
-            <a:off x="3465576" y="1664208"/>
-            <a:ext cx="2267712" cy="1719072"/>
+            <a:off x="3465576" y="1737360"/>
+            <a:ext cx="2267712" cy="1645920"/>
           </a:xfrm>
           <a:prstGeom prst="rect">
             <a:avLst/>
@@ -11437,7 +11437,7 @@
         </p:nvSpPr>
         <p:spPr>
           <a:xfrm>
-            <a:off x="6080760" y="1417320"/>
+            <a:off x="6080760" y="1490472"/>
             <a:ext cx="2267712" cy="182880"/>
           </a:xfrm>
           <a:prstGeom prst="rect">
@@ -11476,8 +11476,8 @@
         </p:nvSpPr>
         <p:spPr>
           <a:xfrm>
-            <a:off x="6080760" y="1664208"/>
-            <a:ext cx="2267712" cy="1719072"/>
+            <a:off x="6080760" y="1737360"/>
+            <a:ext cx="2267712" cy="1645920"/>
           </a:xfrm>
           <a:prstGeom prst="rect">
             <a:avLst/>
@@ -11584,7 +11584,7 @@
         </p:nvSpPr>
         <p:spPr>
           <a:xfrm>
-            <a:off x="1124712" y="3703320"/>
+            <a:off x="1124712" y="3776472"/>
             <a:ext cx="6821424" cy="182880"/>
           </a:xfrm>
           <a:prstGeom prst="rect">
@@ -11623,8 +11623,8 @@
         </p:nvSpPr>
         <p:spPr>
           <a:xfrm>
-            <a:off x="1124712" y="3950208"/>
-            <a:ext cx="6821424" cy="484632"/>
+            <a:off x="1124712" y="4023360"/>
+            <a:ext cx="6821424" cy="411480"/>
           </a:xfrm>
           <a:prstGeom prst="rect">
             <a:avLst/>
@@ -11969,7 +11969,7 @@
         </p:nvSpPr>
         <p:spPr>
           <a:xfrm>
-            <a:off x="5788152" y="1005840"/>
+            <a:off x="5788152" y="1078992"/>
             <a:ext cx="2514600" cy="182880"/>
           </a:xfrm>
           <a:prstGeom prst="rect">
@@ -12008,8 +12008,8 @@
         </p:nvSpPr>
         <p:spPr>
           <a:xfrm>
-            <a:off x="5788152" y="1252728"/>
-            <a:ext cx="2514600" cy="484632"/>
+            <a:off x="5788152" y="1325880"/>
+            <a:ext cx="2514600" cy="411480"/>
           </a:xfrm>
           <a:prstGeom prst="rect">
             <a:avLst/>
@@ -12076,7 +12076,7 @@
         </p:nvSpPr>
         <p:spPr>
           <a:xfrm>
-            <a:off x="5788152" y="2057400"/>
+            <a:off x="5788152" y="2130552"/>
             <a:ext cx="2514600" cy="182880"/>
           </a:xfrm>
           <a:prstGeom prst="rect">
@@ -12115,8 +12115,8 @@
         </p:nvSpPr>
         <p:spPr>
           <a:xfrm>
-            <a:off x="5788152" y="2304288"/>
-            <a:ext cx="2514600" cy="530352"/>
+            <a:off x="5788152" y="2377440"/>
+            <a:ext cx="2514600" cy="457200"/>
           </a:xfrm>
           <a:prstGeom prst="rect">
             <a:avLst/>
@@ -12217,7 +12217,7 @@
         </p:nvSpPr>
         <p:spPr>
           <a:xfrm>
-            <a:off x="5788152" y="3154680"/>
+            <a:off x="5788152" y="3227832"/>
             <a:ext cx="2514600" cy="182880"/>
           </a:xfrm>
           <a:prstGeom prst="rect">
@@ -12256,8 +12256,8 @@
         </p:nvSpPr>
         <p:spPr>
           <a:xfrm>
-            <a:off x="5788152" y="3401568"/>
-            <a:ext cx="2514600" cy="850392"/>
+            <a:off x="5788152" y="3474720"/>
+            <a:ext cx="2514600" cy="777240"/>
           </a:xfrm>
           <a:prstGeom prst="rect">
             <a:avLst/>
